--- a/doc-mk/DP4/DP4-slides-draft.pptx
+++ b/doc-mk/DP4/DP4-slides-draft.pptx
@@ -510,7 +510,7 @@
           </a:p>
           <a:p>
             <a:r>
-              <a:t>P/D 분리 구조에서는 Prefill을 P 노드에서 할지 D 노드에서 할지를 매번 골라야 합니다. DP2가 이동 비용(Tmove), 연산 비용(Tprefill), 대기 비용(Tqueue)으로 이 선택을 최적화합니다.</a:t>
+              <a:t>P/D 분리 구조에서는 Prefill을 어디서 실행하고 Decode를 어디서 시작할지를 매번 골라야 합니다. DP2가 이동 비용(Tmove), 연산 비용(Tprefill), 대기 비용(Tqueue), Decode 노드 간섭(ΔTPOT)으로 이 선택을 최적화합니다.</a:t>
             </a:r>
           </a:p>
           <a:p>
@@ -610,7 +610,7 @@
           </a:p>
           <a:p>
             <a:r>
-              <a:t>DP2는 P/D 노드 중 어디서 Prefill을 실행할지를 비용(Tmove, Tprefill, Tqueue)으로 고르지만 노드 간 KV 전송 비용 자체는 줄이지 못합니다. DP4는 이 전송 구조를 다룹니다. 위쪽 DP2의 Planner가 두 안에서 모두 비용 계산을 하고, 그 입력이 되는 위치와 이동 비용이 두 안에서 서로 다른 방식으로 제공됩니다.</a:t>
+              <a:t>DP2는 P/D 노드 중 어디서 Prefill을 실행하고 Decode를 시작할지를 비용(Tmove, Tprefill, Tqueue, ΔTPOT)으로 고르지만 노드 간 KV 전송 비용 자체는 줄이지 못합니다. DP4는 이 전송 구조를 다룹니다. 위쪽 DP2의 Planner가 두 안에서 모두 비용 계산을 하고, 그 입력이 되는 위치와 이동 비용이 두 안에서 서로 다른 방식으로 제공됩니다.</a:t>
             </a:r>
           </a:p>
           <a:p>
@@ -5093,7 +5093,7 @@
                 </a:solidFill>
                 <a:latin typeface="맑은 고딕" panose="020B0503020000020004" pitchFamily="50" charset="-127"/>
               </a:rPr>
-              <a:t>P/D 분리 구조에서 Prefill 실행 노드는 KV 위치·노드 부하·이동 비용을 고려해 골라야 하며, DP2가 Tmove·Tprefill·Tqueue 비용으로 이를 최적화함</a:t>
+              <a:t>P/D 분리 구조에서 Prefill 실행 노드와 Decode 시작 노드는 KV 위치·노드 부하·이동 비용을 고려해 골라야 하며, DP2가 Tmove·Tprefill·Tqueue·ΔTPOT 비용으로 이를 최적화함</a:t>
             </a:r>
             <a:endParaRPr lang="en-US" altLang="ko-KR" sz="1200" dirty="0">
               <a:solidFill>
@@ -9098,7 +9098,7 @@
                 <a:latin typeface="맑은 고딕"/>
                 <a:ea typeface="맑은 고딕"/>
               </a:rPr>
-              <a:t>Prefill Execution Planner</a:t>
+              <a:t>Execution Planner</a:t>
             </a:r>
           </a:p>
           <a:p>
@@ -10765,7 +10765,7 @@
                 <a:latin typeface="맑은 고딕"/>
                 <a:ea typeface="맑은 고딕"/>
               </a:rPr>
-              <a:t>Prefill Execution Planner</a:t>
+              <a:t>Execution Planner</a:t>
             </a:r>
           </a:p>
           <a:p>

--- a/doc-mk/DP4/DP4-slides-draft.pptx
+++ b/doc-mk/DP4/DP4-slides-draft.pptx
@@ -505,32 +505,32 @@
           <a:lstStyle/>
           <a:p>
             <a:r>
-              <a:t>[DP4 배경 - DP2의 전송 비용 한계]</a:t>
-            </a:r>
-          </a:p>
-          <a:p>
-            <a:r>
-              <a:t>P/D 분리 구조에서는 Prefill을 어디서 실행하고 Decode를 어디서 시작할지를 매번 골라야 합니다. DP2가 이동 비용(Tmove), 연산 비용(Tprefill), 대기 비용(Tqueue), Decode 노드 간섭(ΔTPOT)으로 이 선택을 최적화합니다.</a:t>
-            </a:r>
-          </a:p>
-          <a:p>
-            <a:r>
-              <a:t>그런데 DP2는 어디서 실행할지를 고를 뿐, 노드 사이로 KV를 옮기는 비용 자체는 줄이지 못합니다. 왼쪽 그림처럼 Turn이 이어질 때마다 KV가 P와 D 사이를 오가며 전송이 누적되고, History KV가 커질수록 더 커집니다. 서버가 늘면 KV 위치와 부하 상태를 정확히 공유하는 것도 어려워져, 상태가 낡으면 잘못된 노드를 고르게 됩니다.</a:t>
-            </a:r>
-          </a:p>
-          <a:p>
-            <a:r>
-              <a:t>그래서 DP4는 KV와 상태를 서버 간에 공유하는 구조 자체를 다룹니다. 오른쪽처럼 KV를 노드와 독립된 공유 풀에 두면 위치가 노드에 묶이지 않고 요청 간 공유가 쉬워져 전송 비용을 줄일 수 있다는 것이 가설입니다. 다만 풀 접근도 전송이라 전송 횟수가 반드시 줄지는 않고 병목이 될 수 있어 효과는 측정으로 확인합니다. 현재 환경에는 CXL 공유 풀이 없어 네트워크로 연결된 DRAM·SSD 풀을 기준으로 하고, 매체는 나중에 CXL로 교체할 수 있게 설계합니다.</a:t>
-            </a:r>
-          </a:p>
-          <a:p>
-            <a:r>
-              <a:t>하단은 전송 한계를 푸는 세 방법입니다. DP3는 전송할 바이트를 줄이고, DP2는 위치를 고르고, DP4는 전송 구조를 바꿉니다. 세 방법은 보완 관계입니다.</a:t>
-            </a:r>
-          </a:p>
-          <a:p>
-            <a:r>
-              <a:t>일반 SW로 비유하면 서버끼리 파일을 계속 주고받는 대신 공유 스토리지에 두고 필요한 서버가 읽는 구조로 바꾸는 것입니다.</a:t>
+              <a:t>[DP4 배경 - CXL 공유 풀의 비일관성]</a:t>
+            </a:r>
+          </a:p>
+          <a:p>
+            <a:r>
+              <a:t>DP2는 P/D 노드 중 어디서 Prefill을 할지 비용으로 최적화하지만, 노드 간 KV 전송 비용 자체는 줄이지 못합니다. Turn이 이어질수록 KV가 P와 D 사이를 오가며 누적됩니다.</a:t>
+            </a:r>
+          </a:p>
+          <a:p>
+            <a:r>
+              <a:t>이 전송을 없애는 한 방법이 CXL 공유 메모리 풀입니다. 복사 대신 load와 store로 읽고 쓰며, TraCT와 Beluga가 효과를 보고했습니다. 그런데 CXL 2.0 공유 풀은 호스트 간 캐시 일관성도, 노드 간 atomic 연산도 제공하지 않습니다. 한 노드가 쓴 값이 다른 노드에 보이지 않을 수 있고, 하드웨어 락도 쓸 수 없습니다.</a:t>
+            </a:r>
+          </a:p>
+          <a:p>
+            <a:r>
+              <a:t>그래서 문제가 세 층으로 나뉩니다. 첫째 페이로드 가시성은 두 논문이 거의 같게, 즉 DMA가 캐시를 우회하고 메타데이터 publish를 경계로 삼는 방식으로 풀었습니다. 둘째 메타데이터 일관성, 셋째 상호 배제에서 갈립니다. TraCT는 분산 락, Beluga는 중앙 서버 직렬화입니다. 그래서 DP4의 설계 쟁점은 메타데이터 일관성 책임을 누가 지는가입니다.</a:t>
+            </a:r>
+          </a:p>
+          <a:p>
+            <a:r>
+              <a:t>현재 환경에는 CXL 공유 풀이 없어서 시뮬레이션과 구조 논증, 프로토콜 모델 체크로 평가하며 실측이 아닙니다.</a:t>
+            </a:r>
+          </a:p>
+          <a:p>
+            <a:r>
+              <a:t>일반 SW로 비유하면 캐시 일관성이 없는 공유 디스크에서 여러 서버가 같은 인덱스 파일을 안전하게 갱신하는 문제입니다.</a:t>
             </a:r>
           </a:p>
         </p:txBody>
@@ -605,27 +605,27 @@
           <a:lstStyle/>
           <a:p>
             <a:r>
-              <a:t>[DP4 설계 - 1안 점대점 전송 vs 2안 공유 KV 풀]</a:t>
-            </a:r>
-          </a:p>
-          <a:p>
-            <a:r>
-              <a:t>DP2는 P/D 노드 중 어디서 Prefill을 실행하고 Decode를 시작할지를 비용(Tmove, Tprefill, Tqueue, ΔTPOT)으로 고르지만 노드 간 KV 전송 비용 자체는 줄이지 못합니다. DP4는 이 전송 구조를 다룹니다. 위쪽 DP2의 Planner가 두 안에서 모두 비용 계산을 하고, 그 입력이 되는 위치와 이동 비용이 두 안에서 서로 다른 방식으로 제공됩니다.</a:t>
-            </a:r>
-          </a:p>
-          <a:p>
-            <a:r>
-              <a:t>1안은 현재 P/D 구조처럼 필요할 때 노드 사이로 KV를 직접 보내고, 위치는 중앙 인덱스가 이벤트로 추적합니다. 단순하고 바로 적용할 수 있지만 Turn마다 P와 D 사이를 왕복하는 전송이 누적됩니다.</a:t>
-            </a:r>
-          </a:p>
-          <a:p>
-            <a:r>
-              <a:t>2안은 KV를 노드와 독립된 공유 풀에 두고 모든 노드가 풀에서 읽습니다. 위치가 노드에 묶이지 않고 요청 간 공유가 쉬워 전송 비용이 줄 수 있다는 것이 가설입니다. 다만 풀 접근도 전송이므로 병목이 될 수 있고, 현재 환경에는 CXL 공유 풀이 없어 네트워크로 연결된 DRAM·SSD 풀을 기준으로 평가합니다. 풀 매체는 이후 CXL 풀로 교체할 수 있게 DP1의 백엔드 인터페이스를 쓰는 구조입니다.</a:t>
-            </a:r>
-          </a:p>
-          <a:p>
-            <a:r>
-              <a:t>일반 SW로 비유하면 1안은 서버끼리 파일을 주고받는 점대점 복사, 2안은 공유 스토리지에 두고 필요한 서버가 읽는 구조입니다.</a:t>
+              <a:t>[DP4 설계 - 중앙 직렬화 vs 분산 락]</a:t>
+            </a:r>
+          </a:p>
+          <a:p>
+            <a:r>
+              <a:t>두 안은 공통 전제를 공유합니다. KV 블록은 한 번 쓰면 바뀌지 않고 해시로 식별되며, 페이로드는 GPU DMA가 CPU 캐시를 우회하므로 메타데이터를 READY로 publish하는 시점을 가시성 경계로 삼습니다. 차이는 메타데이터, 즉 prefix 인덱스와 refcount, 할당기, LRU의 일관성 책임을 누가 지는가입니다.</a:t>
+            </a:r>
+          </a:p>
+          <a:p>
+            <a:r>
+              <a:t>C1은 메타데이터 서버 한 곳이 모든 연산을 직렬화하고 노드는 CXL 슬롯 기반 RPC로 요청합니다. Beluga가 택한 방식으로 락이 필요 없지만 서버가 SPOF이자 처리량 상한입니다.</a:t>
+            </a:r>
+          </a:p>
+          <a:p>
+            <a:r>
+              <a:t>C2는 메타데이터를 공유 메모리에 두고 모든 노드가 2단 락으로 직접 갱신합니다. TraCT가 택한 방식으로 중앙 서버가 없지만 락 매니저의 스캔 비용이 노드와 슬롯 수에 비례하고, 락을 쥔 노드가 죽으면 정체되며, clflush 누락 같은 가시성 버그 위험이 있습니다.</a:t>
+            </a:r>
+          </a:p>
+          <a:p>
+            <a:r>
+              <a:t>사전 예측은, control plane 지연이 마이크로초 규모이고 KV 이동과 prefill이 수십~수백 밀리초라서 성능 차이는 작고 trade-off는 변경 용이성, 확장 한계, 장애와 정확성에 있을 것이라는 점입니다. 시뮬레이션과 모델 체크로 이를 확인하며, 결과에 따라 이 예측이 틀릴 수도 있습니다.</a:t>
             </a:r>
           </a:p>
         </p:txBody>
@@ -4510,7 +4510,7 @@
           <a:p>
             <a:r>
               <a:rPr lang="en-US" altLang="ko-KR" dirty="0"/>
-              <a:t>DP4. 서버 간 KV 공유 구조 – 배경</a:t>
+              <a:t>DP4. 비일관 CXL 공유 메모리의 KV 일관성 구조 – 배경</a:t>
             </a:r>
             <a:endParaRPr lang="en-US" altLang="ko-KR" dirty="0"/>
           </a:p>
@@ -4998,7 +4998,7 @@
                 </a:solidFill>
                 <a:latin typeface="맑은 고딕"/>
               </a:rPr>
-              <a:t>→ 결정 최적화(DP2)만으로는 한계가 있어, KV 전송 비용과 서버 간 상태 공유를 구조적으로 푸는 설계가 필요</a:t>
+              <a:t>→ 공유 풀의 이득을 얻으려면 KV 블록과 메타데이터의 일관성을 소프트웨어가 책임져야 하며, 그 책임 구조가 설계 쟁점</a:t>
             </a:r>
             <a:endParaRPr lang="ko-KR" altLang="en-US" sz="1200" b="1" i="0" dirty="0">
               <a:solidFill>
@@ -5093,7 +5093,7 @@
                 </a:solidFill>
                 <a:latin typeface="맑은 고딕" panose="020B0503020000020004" pitchFamily="50" charset="-127"/>
               </a:rPr>
-              <a:t>P/D 분리 구조에서 Prefill 실행 노드와 Decode 시작 노드는 KV 위치·노드 부하·이동 비용을 고려해 골라야 하며, DP2가 Tmove·Tprefill·Tqueue·ΔTPOT 비용으로 이를 최적화함</a:t>
+              <a:t>DP2는 P/D 노드 선택을 비용으로 최적화하지만 노드 간 KV 전송 비용 자체는 줄이지 못함 (Turn마다 P↔D 왕복 누적)</a:t>
             </a:r>
             <a:endParaRPr lang="en-US" altLang="ko-KR" sz="1200" dirty="0">
               <a:solidFill>
@@ -5117,7 +5117,7 @@
                 </a:solidFill>
                 <a:latin typeface="맑은 고딕" panose="020B0503020000020004" pitchFamily="50" charset="-127"/>
               </a:rPr>
-              <a:t>그러나 DP2는 노드 간 KV 전송 비용(Tmove) 자체는 줄이지 못함: Turn마다 KV가 P↔D를 왕복하며 누적되고, History KV가 커질수록 커짐</a:t>
+              <a:t>전송을 없애는 방법이 CXL 공유 풀(복사 대신 load/store)이며 TraCT·Beluga가 효과를 보고함</a:t>
             </a:r>
             <a:endParaRPr lang="en-US" altLang="ko-KR" sz="1200" dirty="0">
               <a:solidFill>
@@ -5141,7 +5141,7 @@
                 </a:solidFill>
                 <a:latin typeface="맑은 고딕" panose="020B0503020000020004" pitchFamily="50" charset="-127"/>
               </a:rPr>
-              <a:t>서버가 늘면 KV 위치·부하 상태를 서버 간에 정확히 공유하기도 어려워, 상태가 낡으면 잘못된 노드를 고르게 됨 (Stale Plan)</a:t>
+              <a:t>그러나 CXL 2.0 공유 풀은 호스트 간 캐시 일관성도, cross-node atomic도 제공하지 않음: 한 노드의 쓰기가 다른 노드에 안 보이고 락도 못 잡음</a:t>
             </a:r>
             <a:endParaRPr lang="en-US" altLang="ko-KR" sz="1200" dirty="0">
               <a:solidFill>
@@ -5186,7 +5186,7 @@
                 </a:solidFill>
                 <a:latin typeface="맑은 고딕"/>
               </a:rPr>
-              <a:t>서버 간 KV를 점대점 전송으로 공유할 것인가, 노드 독립 공유 KV 풀로 공유할 것인가?</a:t>
+              <a:t>비일관 CXL 공유 풀에서 prefix index·refcount·allocator 같은 메타데이터의 일관성 책임을 중앙 서버가 질 것인가, 분산 락으로 노드가 나눠 질 것인가?</a:t>
             </a:r>
             <a:endParaRPr lang="en-US" altLang="ko-KR" sz="1200" dirty="0"/>
           </a:p>
@@ -5204,7 +5204,7 @@
                 </a:solidFill>
                 <a:latin typeface="맑은 고딕"/>
               </a:rPr>
-              <a:t>서버 간 KV 위치·부하 상태를 중앙 인덱스로 모을 것인가, 풀 안에 둘 것인가?</a:t>
+              <a:t>페이로드 가시성(DMA·flush)과 메타데이터 일관성을 어떻게 분리해 최소 비용으로 보장할 것인가?</a:t>
             </a:r>
             <a:endParaRPr lang="en-US" altLang="ko-KR" sz="1200" dirty="0"/>
           </a:p>
@@ -5276,7 +5276,7 @@
         <p:spPr>
           <a:xfrm>
             <a:off x="521208" y="2404872"/>
-            <a:ext cx="3291840" cy="237744"/>
+            <a:ext cx="3566160" cy="237744"/>
           </a:xfrm>
           <a:prstGeom prst="roundRect">
             <a:avLst/>
@@ -5318,7 +5318,7 @@
                 <a:latin typeface="맑은 고딕"/>
                 <a:ea typeface="맑은 고딕"/>
               </a:rPr>
-              <a:t>As-Is: 결정은 최적화, 전송은 그대로 (DP2)</a:t>
+              <a:t>As-Is: 노드 간 KV 복사 (DP2의 한계)</a:t>
             </a:r>
           </a:p>
         </p:txBody>
@@ -5389,7 +5389,7 @@
         <p:spPr>
           <a:xfrm>
             <a:off x="6464808" y="2404872"/>
-            <a:ext cx="3291840" cy="237744"/>
+            <a:ext cx="3566160" cy="237744"/>
           </a:xfrm>
           <a:prstGeom prst="roundRect">
             <a:avLst/>
@@ -5431,7 +5431,7 @@
                 <a:latin typeface="맑은 고딕"/>
                 <a:ea typeface="맑은 고딕"/>
               </a:rPr>
-              <a:t>To-Be: 서버 간 KV 공유 구조 (DP4)</a:t>
+              <a:t>공유 풀이 풀어도 남는 것: 비일관성</a:t>
             </a:r>
           </a:p>
         </p:txBody>
@@ -5926,7 +5926,7 @@
                 <a:latin typeface="맑은 고딕"/>
                 <a:ea typeface="맑은 고딕"/>
               </a:rPr>
-              <a:t>→ 어디서 실행할지(DP2)를 잘 골라도 전송 비용이 한계</a:t>
+              <a:t>→ CXL 공유 풀은 복사 대신 load/store로 이 전송을 없앰 (문헌 [B])</a:t>
             </a:r>
           </a:p>
         </p:txBody>
@@ -5982,7 +5982,7 @@
                 <a:latin typeface="맑은 고딕"/>
                 <a:ea typeface="맑은 고딕"/>
               </a:rPr>
-              <a:t>P 노드</a:t>
+              <a:t>노드 A</a:t>
             </a:r>
           </a:p>
           <a:p>
@@ -5995,7 +5995,7 @@
                 <a:latin typeface="맑은 고딕"/>
                 <a:ea typeface="맑은 고딕"/>
               </a:rPr>
-              <a:t>Prefill</a:t>
+              <a:t>쓰기</a:t>
             </a:r>
           </a:p>
         </p:txBody>
@@ -6051,7 +6051,7 @@
                 <a:latin typeface="맑은 고딕"/>
                 <a:ea typeface="맑은 고딕"/>
               </a:rPr>
-              <a:t>D 노드</a:t>
+              <a:t>노드 B</a:t>
             </a:r>
           </a:p>
           <a:p>
@@ -6064,7 +6064,7 @@
                 <a:latin typeface="맑은 고딕"/>
                 <a:ea typeface="맑은 고딕"/>
               </a:rPr>
-              <a:t>Decode</a:t>
+              <a:t>읽기</a:t>
             </a:r>
           </a:p>
         </p:txBody>
@@ -6120,7 +6120,7 @@
                 <a:latin typeface="맑은 고딕"/>
                 <a:ea typeface="맑은 고딕"/>
               </a:rPr>
-              <a:t>공유 KV 풀</a:t>
+              <a:t>CXL 공유 풀</a:t>
             </a:r>
           </a:p>
           <a:p>
@@ -6128,12 +6128,12 @@
             <a:r>
               <a:rPr sz="650" b="0" i="0">
                 <a:solidFill>
-                  <a:srgbClr val="000000"/>
+                  <a:srgbClr val="C00000"/>
                 </a:solidFill>
                 <a:latin typeface="맑은 고딕"/>
                 <a:ea typeface="맑은 고딕"/>
               </a:rPr>
-              <a:t>DRAM·SSD (CXL로 교체 가능)</a:t>
+              <a:t>호스트 간 캐시 일관성 없음</a:t>
             </a:r>
           </a:p>
           <a:p>
@@ -6141,12 +6141,12 @@
             <a:r>
               <a:rPr sz="650" b="0" i="0">
                 <a:solidFill>
-                  <a:srgbClr val="000000"/>
+                  <a:srgbClr val="C00000"/>
                 </a:solidFill>
                 <a:latin typeface="맑은 고딕"/>
                 <a:ea typeface="맑은 고딕"/>
               </a:rPr>
-              <a:t>위치·상태 메타데이터 포함</a:t>
+              <a:t>cross-node atomic 없음</a:t>
             </a:r>
           </a:p>
         </p:txBody>
@@ -6203,7 +6203,7 @@
           </a:prstGeom>
           <a:ln w="15875">
             <a:solidFill>
-              <a:srgbClr val="2F5597"/>
+              <a:srgbClr val="C00000"/>
             </a:solidFill>
             <a:tailEnd type="triangle"/>
           </a:ln>
@@ -6223,45 +6223,9 @@
           </a:fontRef>
         </p:style>
       </p:cxnSp>
-      <p:cxnSp>
-        <p:nvCxnSpPr>
-          <p:cNvPr id="9082" name="Connector 9081"/>
-          <p:cNvCxnSpPr/>
-          <p:nvPr/>
-        </p:nvCxnSpPr>
-        <p:spPr>
-          <a:xfrm flipH="1">
-            <a:off x="7315200" y="3291839"/>
-            <a:ext cx="685800" cy="0"/>
-          </a:xfrm>
-          <a:prstGeom prst="line">
-            <a:avLst/>
-          </a:prstGeom>
-          <a:ln w="15875">
-            <a:solidFill>
-              <a:srgbClr val="2F5597"/>
-            </a:solidFill>
-            <a:tailEnd type="triangle"/>
-          </a:ln>
-        </p:spPr>
-        <p:style>
-          <a:lnRef idx="2">
-            <a:schemeClr val="accent1"/>
-          </a:lnRef>
-          <a:fillRef idx="0">
-            <a:schemeClr val="accent1"/>
-          </a:fillRef>
-          <a:effectRef idx="1">
-            <a:schemeClr val="accent1"/>
-          </a:effectRef>
-          <a:fontRef idx="minor">
-            <a:schemeClr val="tx1"/>
-          </a:fontRef>
-        </p:style>
-      </p:cxnSp>
-      <p:sp>
-        <p:nvSpPr>
-          <p:cNvPr id="9083" name="TextBox 9082"/>
+      <p:sp>
+        <p:nvSpPr>
+          <p:cNvPr id="9082" name="TextBox 9081"/>
           <p:cNvSpPr txBox="1"/>
           <p:nvPr/>
         </p:nvSpPr>
@@ -6290,14 +6254,14 @@
                 <a:latin typeface="맑은 고딕"/>
                 <a:ea typeface="맑은 고딕"/>
               </a:rPr>
-              <a:t>publish</a:t>
-            </a:r>
-          </a:p>
-        </p:txBody>
-      </p:sp>
-      <p:sp>
-        <p:nvSpPr>
-          <p:cNvPr id="9084" name="TextBox 9083"/>
+              <a:t>write</a:t>
+            </a:r>
+          </a:p>
+        </p:txBody>
+      </p:sp>
+      <p:sp>
+        <p:nvSpPr>
+          <p:cNvPr id="9083" name="TextBox 9082"/>
           <p:cNvSpPr txBox="1"/>
           <p:nvPr/>
         </p:nvSpPr>
@@ -6321,55 +6285,19 @@
             <a:r>
               <a:rPr sz="650" b="1" i="0">
                 <a:solidFill>
-                  <a:srgbClr val="2F5597"/>
+                  <a:srgbClr val="C00000"/>
                 </a:solidFill>
                 <a:latin typeface="맑은 고딕"/>
                 <a:ea typeface="맑은 고딕"/>
               </a:rPr>
-              <a:t>read</a:t>
-            </a:r>
-          </a:p>
-        </p:txBody>
-      </p:sp>
-      <p:sp>
-        <p:nvSpPr>
-          <p:cNvPr id="9085" name="TextBox 9084"/>
-          <p:cNvSpPr txBox="1"/>
-          <p:nvPr/>
-        </p:nvSpPr>
-        <p:spPr>
-          <a:xfrm>
-            <a:off x="7315200" y="3310127"/>
-            <a:ext cx="777240" cy="128016"/>
-          </a:xfrm>
-          <a:prstGeom prst="rect">
-            <a:avLst/>
-          </a:prstGeom>
-          <a:noFill/>
-        </p:spPr>
-        <p:txBody>
-          <a:bodyPr wrap="square" lIns="0" tIns="0" rIns="0" bIns="0" anchor="t">
-            <a:spAutoFit/>
-          </a:bodyPr>
-          <a:lstStyle/>
-          <a:p>
-            <a:pPr algn="ctr"/>
-            <a:r>
-              <a:rPr sz="650" b="1" i="0">
-                <a:solidFill>
-                  <a:srgbClr val="2F5597"/>
-                </a:solidFill>
-                <a:latin typeface="맑은 고딕"/>
-                <a:ea typeface="맑은 고딕"/>
-              </a:rPr>
-              <a:t>read(다음)</a:t>
-            </a:r>
-          </a:p>
-        </p:txBody>
-      </p:sp>
-      <p:sp>
-        <p:nvSpPr>
-          <p:cNvPr id="9086" name="TextBox 9085"/>
+              <a:t>stale read?</a:t>
+            </a:r>
+          </a:p>
+        </p:txBody>
+      </p:sp>
+      <p:sp>
+        <p:nvSpPr>
+          <p:cNvPr id="9084" name="TextBox 9083"/>
           <p:cNvSpPr txBox="1"/>
           <p:nvPr/>
         </p:nvSpPr>
@@ -6398,14 +6326,14 @@
                 <a:latin typeface="맑은 고딕"/>
                 <a:ea typeface="맑은 고딕"/>
               </a:rPr>
-              <a:t>History KV가 풀에 유지되어 위치가 노드에 묶이지 않음</a:t>
-            </a:r>
-          </a:p>
-        </p:txBody>
-      </p:sp>
-      <p:sp>
-        <p:nvSpPr>
-          <p:cNvPr id="9087" name="TextBox 9086"/>
+              <a:t>한 노드의 쓰기가 다른 노드 캐시에 자동으로 보이지 않고, 락도 하드웨어가 못 줌</a:t>
+            </a:r>
+          </a:p>
+        </p:txBody>
+      </p:sp>
+      <p:sp>
+        <p:nvSpPr>
+          <p:cNvPr id="9085" name="TextBox 9084"/>
           <p:cNvSpPr txBox="1"/>
           <p:nvPr/>
         </p:nvSpPr>
@@ -6434,7 +6362,7 @@
                 <a:latin typeface="맑은 고딕"/>
                 <a:ea typeface="맑은 고딕"/>
               </a:rPr>
-              <a:t>위치가 노드에 묶이지 않고 요청 간 공유 가능 → Tmove를 균일하게·줄일 수 있는지가 쟁점</a:t>
+              <a:t>세 층: ① 페이로드 가시성  ② 메타데이터 일관성  ③ 상호 배제</a:t>
             </a:r>
           </a:p>
           <a:p>
@@ -6447,14 +6375,14 @@
                 <a:latin typeface="맑은 고딕"/>
                 <a:ea typeface="맑은 고딕"/>
               </a:rPr>
-              <a:t>→ 풀 접근도 전송이므로 감소 여부는 측정 대상 (가설)</a:t>
-            </a:r>
-          </a:p>
-        </p:txBody>
-      </p:sp>
-      <p:sp>
-        <p:nvSpPr>
-          <p:cNvPr id="9088" name="TextBox 9087"/>
+              <a:t>→ ①은 두 논문이 거의 같게 풀었고, ②③ 책임 구조가 후보를 가름</a:t>
+            </a:r>
+          </a:p>
+        </p:txBody>
+      </p:sp>
+      <p:sp>
+        <p:nvSpPr>
+          <p:cNvPr id="9086" name="TextBox 9085"/>
           <p:cNvSpPr txBox="1"/>
           <p:nvPr/>
         </p:nvSpPr>
@@ -6490,7 +6418,7 @@
       </p:sp>
       <p:sp>
         <p:nvSpPr>
-          <p:cNvPr id="9089" name="Rounded Rectangle 9088"/>
+          <p:cNvPr id="9087" name="Rounded Rectangle 9086"/>
           <p:cNvSpPr/>
           <p:nvPr/>
         </p:nvSpPr>
@@ -6559,7 +6487,7 @@
       </p:sp>
       <p:sp>
         <p:nvSpPr>
-          <p:cNvPr id="9090" name="TextBox 9089"/>
+          <p:cNvPr id="9088" name="TextBox 9087"/>
           <p:cNvSpPr txBox="1"/>
           <p:nvPr/>
         </p:nvSpPr>
@@ -6595,7 +6523,7 @@
       </p:sp>
       <p:sp>
         <p:nvSpPr>
-          <p:cNvPr id="9091" name="Rounded Rectangle 9090"/>
+          <p:cNvPr id="9089" name="Rounded Rectangle 9088"/>
           <p:cNvSpPr/>
           <p:nvPr/>
         </p:nvSpPr>
@@ -6664,7 +6592,7 @@
       </p:sp>
       <p:sp>
         <p:nvSpPr>
-          <p:cNvPr id="9092" name="TextBox 9091"/>
+          <p:cNvPr id="9090" name="TextBox 9089"/>
           <p:cNvSpPr txBox="1"/>
           <p:nvPr/>
         </p:nvSpPr>
@@ -6700,7 +6628,7 @@
       </p:sp>
       <p:sp>
         <p:nvSpPr>
-          <p:cNvPr id="9093" name="Rounded Rectangle 9092"/>
+          <p:cNvPr id="9091" name="Rounded Rectangle 9090"/>
           <p:cNvSpPr/>
           <p:nvPr/>
         </p:nvSpPr>
@@ -6749,7 +6677,7 @@
                 <a:latin typeface="맑은 고딕"/>
                 <a:ea typeface="맑은 고딕"/>
               </a:rPr>
-              <a:t>DP4  전송 구조를 바꾼다</a:t>
+              <a:t>DP4  공유를 안전하게 한다</a:t>
             </a:r>
           </a:p>
           <a:p>
@@ -6762,14 +6690,14 @@
                 <a:latin typeface="맑은 고딕"/>
                 <a:ea typeface="맑은 고딕"/>
               </a:rPr>
-              <a:t>서버 간 KV·상태 공유 (본 DP)</a:t>
-            </a:r>
-          </a:p>
-        </p:txBody>
-      </p:sp>
-      <p:sp>
-        <p:nvSpPr>
-          <p:cNvPr id="9094" name="TextBox 9093"/>
+              <a:t>비일관 CXL 풀의 KV·메타데이터 일관성 (본 DP)</a:t>
+            </a:r>
+          </a:p>
+        </p:txBody>
+      </p:sp>
+      <p:sp>
+        <p:nvSpPr>
+          <p:cNvPr id="9092" name="TextBox 9091"/>
           <p:cNvSpPr txBox="1"/>
           <p:nvPr/>
         </p:nvSpPr>
@@ -6798,14 +6726,14 @@
                 <a:latin typeface="맑은 고딕"/>
                 <a:ea typeface="맑은 고딕"/>
               </a:rPr>
-              <a:t>※ 평가는 CXL 공유 풀이 없는 환경(네트워크 연결 DRAM·SSD 풀) 기준이며, 풀 매체는 이후 CXL 풀로 교체 가능하도록 DP1의 백엔드 인터페이스로 설계</a:t>
-            </a:r>
-          </a:p>
-        </p:txBody>
-      </p:sp>
-      <p:sp>
-        <p:nvSpPr>
-          <p:cNvPr id="9095" name="TextBox 9094"/>
+              <a:t>※ 현재 환경에는 CXL 공유 풀이 없어 시뮬레이션 + 구조 논증 + 프로토콜 모델 체크로 평가 (실측 [A] 아님, [B+C]). 락 상수 등은 가정 값이며 공개</a:t>
+            </a:r>
+          </a:p>
+        </p:txBody>
+      </p:sp>
+      <p:sp>
+        <p:nvSpPr>
+          <p:cNvPr id="9093" name="TextBox 9092"/>
           <p:cNvSpPr txBox="1"/>
           <p:nvPr/>
         </p:nvSpPr>
@@ -6834,7 +6762,7 @@
                 <a:latin typeface="맑은 고딕"/>
                 <a:ea typeface="맑은 고딕"/>
               </a:rPr>
-              <a:t>(세 방법은 서로 보완: DP3로 전송량을 줄이고, DP2로 위치를 고르고, DP4로 전송 경로와 상태 공유 구조를 바꿈. DP2의 결과는 DP4 구성(전송 vs 공유)을 병기해 보고)</a:t>
+              <a:t>(세 방법은 보완 관계: DP3로 전송량을 줄이고, DP2로 위치를 고르고, DP4로 공유 풀을 정확하게 만듦)</a:t>
             </a:r>
           </a:p>
         </p:txBody>
@@ -7020,7 +6948,7 @@
                       </a:pPr>
                       <a:r>
                         <a:rPr lang="en-US" altLang="ko-KR" sz="1200" b="1" dirty="0"/>
-                        <a:t>(1안) 점대점 전송 구조 (Direct Transfer)</a:t>
+                        <a:t>(C1) 중앙 직렬화 구조 (Central Metadata Server)</a:t>
                       </a:r>
                       <a:endParaRPr lang="ko-KR" altLang="en-US" sz="1200" b="1" dirty="0"/>
                     </a:p>
@@ -7107,7 +7035,7 @@
                       </a:pPr>
                       <a:r>
                         <a:rPr lang="en-US" altLang="ko-KR" sz="1200" b="1" dirty="0"/>
-                        <a:t>(2안) 공유 KV 풀 구조 (Shared KV Pool)</a:t>
+                        <a:t>(C2) 분산 락 구조 (Distributed Lock)</a:t>
                       </a:r>
                       <a:endParaRPr lang="en-US" altLang="ko-KR" sz="1200" b="1" dirty="0"/>
                     </a:p>
@@ -7501,7 +7429,7 @@
                           <a:ea typeface="+mn-ea"/>
                           <a:cs typeface="+mn-cs"/>
                         </a:rPr>
-                        <a:t>기존 P/D 전송 경로를 그대로 사용 (도입 단순)</a:t>
+                        <a:t>락·원자 연산이 필요 없어 정확성 논증이 단순</a:t>
                       </a:r>
                       <a:endParaRPr lang="en-US" altLang="ko-KR" sz="1200" strike="noStrike" kern="1200" baseline="0" dirty="0">
                         <a:solidFill>
@@ -7534,7 +7462,7 @@
                           <a:ea typeface="+mn-ea"/>
                           <a:cs typeface="+mn-cs"/>
                         </a:rPr>
-                        <a:t>공유 매체가 필요 없어 2노드 환경에서 바로 적용</a:t>
+                        <a:t>메타데이터 연산이 한 곳에서 직렬화되어 인덱스·refcount 일관성이 자연스러움</a:t>
                       </a:r>
                       <a:endParaRPr lang="en-US" altLang="ko-KR" sz="1200" strike="noStrike" kern="1200" baseline="0" dirty="0">
                         <a:solidFill>
@@ -7631,7 +7559,32 @@
                         <a:rPr lang="ko-KR" altLang="en-US" sz="1200" strike="noStrike" baseline="0" dirty="0">
                           <a:effectLst/>
                         </a:rPr>
-                        <a:t>KV 위치가 노드에 독립적이라 Tmove가 균일하고 Comp.KV 등 요청 간 공유 용이 (가설)</a:t>
+                        <a:t>서버 한 곳을 거치지 않아 SPOF·병목이 없고 노드 수에 따른 확장 여지</a:t>
+                      </a:r>
+                    </a:p>
+                    <a:p>
+                      <a:pPr marL="228600" marR="0" lvl="0" indent="-228600" algn="l" defTabSz="914400" rtl="0" eaLnBrk="1" fontAlgn="auto" latinLnBrk="1" hangingPunct="1">
+                        <a:lnSpc>
+                          <a:spcPct val="100000"/>
+                        </a:lnSpc>
+                        <a:spcBef>
+                          <a:spcPts val="0"/>
+                        </a:spcBef>
+                        <a:spcAft>
+                          <a:spcPts val="0"/>
+                        </a:spcAft>
+                        <a:buClrTx/>
+                        <a:buSzTx/>
+                        <a:buFont typeface="Wingdings" panose="05000000000000000000" pitchFamily="2" charset="2"/>
+                        <a:buChar char="§"/>
+                        <a:tabLst/>
+                        <a:defRPr/>
+                      </a:pPr>
+                      <a:r>
+                        <a:rPr lang="ko-KR" altLang="en-US" sz="1200" strike="noStrike" baseline="0" dirty="0">
+                          <a:effectLst/>
+                        </a:rPr>
+                        <a:t>공유 메모리 직접 접근으로 control plane 지연이 작음</a:t>
                       </a:r>
                     </a:p>
                   </a:txBody>
@@ -7797,7 +7750,7 @@
                         <a:rPr lang="ko-KR" altLang="en-US" sz="1200" strike="noStrike" baseline="0" dirty="0">
                           <a:effectLst/>
                         </a:rPr>
-                        <a:t>Turn마다 P↔D 왕복 전송이 누적되어 DP2의 한계가 그대로 남음, 중앙 인덱스 병목·상태 지연 위험</a:t>
+                        <a:t>서버가 SPOF이자 확장 한계 (서버 처리량 상한), 장애 시 복구 설계 필요, CXL RPC는 신뢰성 보장이 약함</a:t>
                       </a:r>
                     </a:p>
                   </a:txBody>
@@ -7875,7 +7828,7 @@
                         <a:rPr lang="ko-KR" altLang="en-US" sz="1200" strike="noStrike" baseline="0" dirty="0">
                           <a:effectLst/>
                         </a:rPr>
-                        <a:t>풀 접근도 전송이라 병목 가능 (네트워크 풀 기준 평가), 풀 일관성·장애 처리·관리 오버헤드</a:t>
+                        <a:t>락 매니저 스캔 비용이 노드·슬롯 수에 비례, 락 보유 노드 장애 시 정체, clflush 누락 같은 가시성 버그 위험</a:t>
                       </a:r>
                     </a:p>
                   </a:txBody>
@@ -8315,7 +8268,7 @@
           <a:p>
             <a:r>
               <a:rPr lang="en-US" altLang="ko-KR" dirty="0"/>
-              <a:t>DP4. 서버 간 KV 공유 구조 – 설계</a:t>
+              <a:t>DP4. 비일관 CXL 공유 메모리의 KV 일관성 구조 – 설계</a:t>
             </a:r>
             <a:endParaRPr lang="ko-KR" altLang="en-US" strike="sngStrike" dirty="0"/>
           </a:p>
@@ -8397,7 +8350,7 @@
                   <a:schemeClr val="bg1"/>
                 </a:solidFill>
               </a:rPr>
-              <a:t>서버 간 KV 전송 비용을 줄이고 KV 상태를 공유하는 구조</a:t>
+              <a:t>메타데이터 일관성 책임을 누가 지는가: 중앙 직렬화 vs 분산 락</a:t>
             </a:r>
           </a:p>
         </p:txBody>
@@ -8971,7 +8924,7 @@
           <a:p>
             <a:r>
               <a:rPr lang="en-US" altLang="ko-KR" sz="1100" dirty="0"/>
-              <a:t>“필요할 때 P↔D 노드 간에 KV를 직접 전송하고, 위치는 중앙 인덱스로 추적”</a:t>
+              <a:t>“메타데이터 서버가 모든 갱신을 직렬화하고, 노드는 CXL 슬롯 RPC로 요청 (Beluga 방식)”</a:t>
             </a:r>
           </a:p>
         </p:txBody>
@@ -9000,7 +8953,7 @@
           <a:p>
             <a:r>
               <a:rPr lang="en-US" altLang="ko-KR" sz="1100" dirty="0"/>
-              <a:t>“공유 풀에 KV를 두고 모든 노드가 풀에서 읽으며, 위치는 풀 메타데이터로 관리”</a:t>
+              <a:t>“메타데이터를 공유 메모리에 두고 모든 노드가 2단 락으로 직접 갱신 (TraCT 방식)”</a:t>
             </a:r>
           </a:p>
         </p:txBody>
@@ -9055,8 +9008,8 @@
         </p:nvSpPr>
         <p:spPr>
           <a:xfrm>
-            <a:off x="2359152" y="1764792"/>
-            <a:ext cx="2926080" cy="365760"/>
+            <a:off x="1993392" y="1764792"/>
+            <a:ext cx="3566160" cy="310896"/>
           </a:xfrm>
           <a:prstGeom prst="rect">
             <a:avLst/>
@@ -9098,11 +9051,8 @@
                 <a:latin typeface="맑은 고딕"/>
                 <a:ea typeface="맑은 고딕"/>
               </a:rPr>
-              <a:t>Execution Planner</a:t>
-            </a:r>
-          </a:p>
-          <a:p>
-            <a:pPr algn="ctr"/>
+              <a:t>공통 전제</a:t>
+            </a:r>
             <a:r>
               <a:rPr sz="700" b="0" i="0">
                 <a:solidFill>
@@ -9111,20 +9061,1294 @@
                 <a:latin typeface="맑은 고딕"/>
                 <a:ea typeface="맑은 고딕"/>
               </a:rPr>
-              <a:t>Tmove · Tprefill · Tqueue 비용으로 P/D 노드 선택</a:t>
-            </a:r>
-          </a:p>
-        </p:txBody>
-      </p:sp>
-      <p:sp>
-        <p:nvSpPr>
-          <p:cNvPr id="140" name="Rounded Rectangle 139"/>
+              <a:t>: 페이로드는 DMA(캐시 우회) + publish를 가시성 경계로</a:t>
+            </a:r>
+          </a:p>
+        </p:txBody>
+      </p:sp>
+      <p:sp>
+        <p:nvSpPr>
+          <p:cNvPr id="140" name="Rectangle 139"/>
           <p:cNvSpPr/>
           <p:nvPr/>
         </p:nvSpPr>
         <p:spPr>
           <a:xfrm>
-            <a:off x="5330952" y="1783080"/>
+            <a:off x="1261872" y="2240280"/>
+            <a:ext cx="1417320" cy="1097280"/>
+          </a:xfrm>
+          <a:prstGeom prst="rect">
+            <a:avLst/>
+          </a:prstGeom>
+          <a:solidFill>
+            <a:srgbClr val="F4F8FD"/>
+          </a:solidFill>
+          <a:ln w="15875">
+            <a:solidFill>
+              <a:srgbClr val="2F5597"/>
+            </a:solidFill>
+          </a:ln>
+          <a:effectLst/>
+        </p:spPr>
+        <p:style>
+          <a:lnRef idx="1">
+            <a:schemeClr val="accent1"/>
+          </a:lnRef>
+          <a:fillRef idx="3">
+            <a:schemeClr val="accent1"/>
+          </a:fillRef>
+          <a:effectRef idx="2">
+            <a:schemeClr val="accent1"/>
+          </a:effectRef>
+          <a:fontRef idx="minor">
+            <a:schemeClr val="lt1"/>
+          </a:fontRef>
+        </p:style>
+        <p:txBody>
+          <a:bodyPr rtlCol="0" anchor="ctr" wrap="square" lIns="36576" tIns="18288" rIns="36576" bIns="18288"/>
+          <a:lstStyle/>
+          <a:p>
+            <a:pPr algn="ctr"/>
+            <a:r>
+              <a:rPr sz="800" b="0" i="0">
+                <a:solidFill>
+                  <a:srgbClr val="000000"/>
+                </a:solidFill>
+                <a:latin typeface="맑은 고딕"/>
+                <a:ea typeface="맑은 고딕"/>
+              </a:rPr>
+              <a:t/>
+            </a:r>
+          </a:p>
+        </p:txBody>
+      </p:sp>
+      <p:sp>
+        <p:nvSpPr>
+          <p:cNvPr id="141" name="Rectangle 140"/>
+          <p:cNvSpPr/>
+          <p:nvPr/>
+        </p:nvSpPr>
+        <p:spPr>
+          <a:xfrm>
+            <a:off x="1261872" y="2240280"/>
+            <a:ext cx="822960" cy="173736"/>
+          </a:xfrm>
+          <a:prstGeom prst="rect">
+            <a:avLst/>
+          </a:prstGeom>
+          <a:solidFill>
+            <a:srgbClr val="2F5597"/>
+          </a:solidFill>
+          <a:ln w="12700">
+            <a:solidFill>
+              <a:srgbClr val="2F5597"/>
+            </a:solidFill>
+          </a:ln>
+          <a:effectLst/>
+        </p:spPr>
+        <p:style>
+          <a:lnRef idx="1">
+            <a:schemeClr val="accent1"/>
+          </a:lnRef>
+          <a:fillRef idx="3">
+            <a:schemeClr val="accent1"/>
+          </a:fillRef>
+          <a:effectRef idx="2">
+            <a:schemeClr val="accent1"/>
+          </a:effectRef>
+          <a:fontRef idx="minor">
+            <a:schemeClr val="lt1"/>
+          </a:fontRef>
+        </p:style>
+        <p:txBody>
+          <a:bodyPr rtlCol="0" anchor="ctr" wrap="square" lIns="45720" tIns="0" rIns="18288" bIns="0"/>
+          <a:lstStyle/>
+          <a:p>
+            <a:pPr algn="l"/>
+            <a:r>
+              <a:rPr sz="700" b="1" i="0">
+                <a:solidFill>
+                  <a:srgbClr val="FFFFFF"/>
+                </a:solidFill>
+                <a:latin typeface="맑은 고딕"/>
+                <a:ea typeface="맑은 고딕"/>
+              </a:rPr>
+              <a:t>«node» P 노드</a:t>
+            </a:r>
+          </a:p>
+        </p:txBody>
+      </p:sp>
+      <p:sp>
+        <p:nvSpPr>
+          <p:cNvPr id="142" name="Rectangle 141"/>
+          <p:cNvSpPr/>
+          <p:nvPr/>
+        </p:nvSpPr>
+        <p:spPr>
+          <a:xfrm>
+            <a:off x="1371600" y="2514600"/>
+            <a:ext cx="1188720" cy="365760"/>
+          </a:xfrm>
+          <a:prstGeom prst="rect">
+            <a:avLst/>
+          </a:prstGeom>
+          <a:solidFill>
+            <a:srgbClr val="DAE3F3"/>
+          </a:solidFill>
+          <a:ln w="12700">
+            <a:solidFill>
+              <a:srgbClr val="2F5597"/>
+            </a:solidFill>
+          </a:ln>
+          <a:effectLst/>
+        </p:spPr>
+        <p:style>
+          <a:lnRef idx="1">
+            <a:schemeClr val="accent1"/>
+          </a:lnRef>
+          <a:fillRef idx="3">
+            <a:schemeClr val="accent1"/>
+          </a:fillRef>
+          <a:effectRef idx="2">
+            <a:schemeClr val="accent1"/>
+          </a:effectRef>
+          <a:fontRef idx="minor">
+            <a:schemeClr val="lt1"/>
+          </a:fontRef>
+        </p:style>
+        <p:txBody>
+          <a:bodyPr rtlCol="0" anchor="ctr" wrap="square" lIns="64008" tIns="18288" rIns="27432" bIns="18288"/>
+          <a:lstStyle/>
+          <a:p>
+            <a:pPr algn="ctr"/>
+            <a:r>
+              <a:rPr sz="750" b="1" i="0">
+                <a:solidFill>
+                  <a:srgbClr val="000000"/>
+                </a:solidFill>
+                <a:latin typeface="맑은 고딕"/>
+                <a:ea typeface="맑은 고딕"/>
+              </a:rPr>
+              <a:t>vLLM + KV 커넥터</a:t>
+            </a:r>
+          </a:p>
+        </p:txBody>
+      </p:sp>
+      <p:sp>
+        <p:nvSpPr>
+          <p:cNvPr id="143" name="Rectangle 142"/>
+          <p:cNvSpPr/>
+          <p:nvPr/>
+        </p:nvSpPr>
+        <p:spPr>
+          <a:xfrm>
+            <a:off x="1325880" y="2569464"/>
+            <a:ext cx="91440" cy="50292"/>
+          </a:xfrm>
+          <a:prstGeom prst="rect">
+            <a:avLst/>
+          </a:prstGeom>
+          <a:solidFill>
+            <a:srgbClr val="DAE3F3"/>
+          </a:solidFill>
+          <a:ln w="9525">
+            <a:solidFill>
+              <a:srgbClr val="2F5597"/>
+            </a:solidFill>
+          </a:ln>
+          <a:effectLst/>
+        </p:spPr>
+        <p:style>
+          <a:lnRef idx="1">
+            <a:schemeClr val="accent1"/>
+          </a:lnRef>
+          <a:fillRef idx="3">
+            <a:schemeClr val="accent1"/>
+          </a:fillRef>
+          <a:effectRef idx="2">
+            <a:schemeClr val="accent1"/>
+          </a:effectRef>
+          <a:fontRef idx="minor">
+            <a:schemeClr val="lt1"/>
+          </a:fontRef>
+        </p:style>
+        <p:txBody>
+          <a:bodyPr rtlCol="0" anchor="ctr" wrap="square" lIns="36576" tIns="18288" rIns="36576" bIns="18288"/>
+          <a:lstStyle/>
+          <a:p>
+            <a:pPr algn="ctr"/>
+            <a:r>
+              <a:rPr sz="800" b="0" i="0">
+                <a:solidFill>
+                  <a:srgbClr val="000000"/>
+                </a:solidFill>
+                <a:latin typeface="맑은 고딕"/>
+                <a:ea typeface="맑은 고딕"/>
+              </a:rPr>
+              <a:t/>
+            </a:r>
+          </a:p>
+        </p:txBody>
+      </p:sp>
+      <p:sp>
+        <p:nvSpPr>
+          <p:cNvPr id="144" name="Rectangle 143"/>
+          <p:cNvSpPr/>
+          <p:nvPr/>
+        </p:nvSpPr>
+        <p:spPr>
+          <a:xfrm>
+            <a:off x="1325880" y="2660904"/>
+            <a:ext cx="91440" cy="50292"/>
+          </a:xfrm>
+          <a:prstGeom prst="rect">
+            <a:avLst/>
+          </a:prstGeom>
+          <a:solidFill>
+            <a:srgbClr val="DAE3F3"/>
+          </a:solidFill>
+          <a:ln w="9525">
+            <a:solidFill>
+              <a:srgbClr val="2F5597"/>
+            </a:solidFill>
+          </a:ln>
+          <a:effectLst/>
+        </p:spPr>
+        <p:style>
+          <a:lnRef idx="1">
+            <a:schemeClr val="accent1"/>
+          </a:lnRef>
+          <a:fillRef idx="3">
+            <a:schemeClr val="accent1"/>
+          </a:fillRef>
+          <a:effectRef idx="2">
+            <a:schemeClr val="accent1"/>
+          </a:effectRef>
+          <a:fontRef idx="minor">
+            <a:schemeClr val="lt1"/>
+          </a:fontRef>
+        </p:style>
+        <p:txBody>
+          <a:bodyPr rtlCol="0" anchor="ctr" wrap="square" lIns="36576" tIns="18288" rIns="36576" bIns="18288"/>
+          <a:lstStyle/>
+          <a:p>
+            <a:pPr algn="ctr"/>
+            <a:r>
+              <a:rPr sz="800" b="0" i="0">
+                <a:solidFill>
+                  <a:srgbClr val="000000"/>
+                </a:solidFill>
+                <a:latin typeface="맑은 고딕"/>
+                <a:ea typeface="맑은 고딕"/>
+              </a:rPr>
+              <a:t/>
+            </a:r>
+          </a:p>
+        </p:txBody>
+      </p:sp>
+      <p:sp>
+        <p:nvSpPr>
+          <p:cNvPr id="145" name="Rectangle 144"/>
+          <p:cNvSpPr/>
+          <p:nvPr/>
+        </p:nvSpPr>
+        <p:spPr>
+          <a:xfrm>
+            <a:off x="1371600" y="2953512"/>
+            <a:ext cx="1188720" cy="274320"/>
+          </a:xfrm>
+          <a:prstGeom prst="rect">
+            <a:avLst/>
+          </a:prstGeom>
+          <a:solidFill>
+            <a:srgbClr val="F2F2F2"/>
+          </a:solidFill>
+          <a:ln w="12700">
+            <a:solidFill>
+              <a:srgbClr val="7F7F7F"/>
+            </a:solidFill>
+          </a:ln>
+          <a:effectLst/>
+        </p:spPr>
+        <p:style>
+          <a:lnRef idx="1">
+            <a:schemeClr val="accent1"/>
+          </a:lnRef>
+          <a:fillRef idx="3">
+            <a:schemeClr val="accent1"/>
+          </a:fillRef>
+          <a:effectRef idx="2">
+            <a:schemeClr val="accent1"/>
+          </a:effectRef>
+          <a:fontRef idx="minor">
+            <a:schemeClr val="lt1"/>
+          </a:fontRef>
+        </p:style>
+        <p:txBody>
+          <a:bodyPr rtlCol="0" anchor="ctr" wrap="square" lIns="36576" tIns="18288" rIns="36576" bIns="18288"/>
+          <a:lstStyle/>
+          <a:p>
+            <a:pPr algn="ctr"/>
+            <a:r>
+              <a:rPr sz="650" b="0" i="0">
+                <a:solidFill>
+                  <a:srgbClr val="000000"/>
+                </a:solidFill>
+                <a:latin typeface="맑은 고딕"/>
+                <a:ea typeface="맑은 고딕"/>
+              </a:rPr>
+              <a:t>GPU DMA · CPU flush</a:t>
+            </a:r>
+          </a:p>
+        </p:txBody>
+      </p:sp>
+      <p:sp>
+        <p:nvSpPr>
+          <p:cNvPr id="146" name="Rectangle 145"/>
+          <p:cNvSpPr/>
+          <p:nvPr/>
+        </p:nvSpPr>
+        <p:spPr>
+          <a:xfrm>
+            <a:off x="4919472" y="2240280"/>
+            <a:ext cx="1417320" cy="1097280"/>
+          </a:xfrm>
+          <a:prstGeom prst="rect">
+            <a:avLst/>
+          </a:prstGeom>
+          <a:solidFill>
+            <a:srgbClr val="F4F8FD"/>
+          </a:solidFill>
+          <a:ln w="15875">
+            <a:solidFill>
+              <a:srgbClr val="2F5597"/>
+            </a:solidFill>
+          </a:ln>
+          <a:effectLst/>
+        </p:spPr>
+        <p:style>
+          <a:lnRef idx="1">
+            <a:schemeClr val="accent1"/>
+          </a:lnRef>
+          <a:fillRef idx="3">
+            <a:schemeClr val="accent1"/>
+          </a:fillRef>
+          <a:effectRef idx="2">
+            <a:schemeClr val="accent1"/>
+          </a:effectRef>
+          <a:fontRef idx="minor">
+            <a:schemeClr val="lt1"/>
+          </a:fontRef>
+        </p:style>
+        <p:txBody>
+          <a:bodyPr rtlCol="0" anchor="ctr" wrap="square" lIns="36576" tIns="18288" rIns="36576" bIns="18288"/>
+          <a:lstStyle/>
+          <a:p>
+            <a:pPr algn="ctr"/>
+            <a:r>
+              <a:rPr sz="800" b="0" i="0">
+                <a:solidFill>
+                  <a:srgbClr val="000000"/>
+                </a:solidFill>
+                <a:latin typeface="맑은 고딕"/>
+                <a:ea typeface="맑은 고딕"/>
+              </a:rPr>
+              <a:t/>
+            </a:r>
+          </a:p>
+        </p:txBody>
+      </p:sp>
+      <p:sp>
+        <p:nvSpPr>
+          <p:cNvPr id="147" name="Rectangle 146"/>
+          <p:cNvSpPr/>
+          <p:nvPr/>
+        </p:nvSpPr>
+        <p:spPr>
+          <a:xfrm>
+            <a:off x="4919472" y="2240280"/>
+            <a:ext cx="822960" cy="173736"/>
+          </a:xfrm>
+          <a:prstGeom prst="rect">
+            <a:avLst/>
+          </a:prstGeom>
+          <a:solidFill>
+            <a:srgbClr val="2F5597"/>
+          </a:solidFill>
+          <a:ln w="12700">
+            <a:solidFill>
+              <a:srgbClr val="2F5597"/>
+            </a:solidFill>
+          </a:ln>
+          <a:effectLst/>
+        </p:spPr>
+        <p:style>
+          <a:lnRef idx="1">
+            <a:schemeClr val="accent1"/>
+          </a:lnRef>
+          <a:fillRef idx="3">
+            <a:schemeClr val="accent1"/>
+          </a:fillRef>
+          <a:effectRef idx="2">
+            <a:schemeClr val="accent1"/>
+          </a:effectRef>
+          <a:fontRef idx="minor">
+            <a:schemeClr val="lt1"/>
+          </a:fontRef>
+        </p:style>
+        <p:txBody>
+          <a:bodyPr rtlCol="0" anchor="ctr" wrap="square" lIns="45720" tIns="0" rIns="18288" bIns="0"/>
+          <a:lstStyle/>
+          <a:p>
+            <a:pPr algn="l"/>
+            <a:r>
+              <a:rPr sz="700" b="1" i="0">
+                <a:solidFill>
+                  <a:srgbClr val="FFFFFF"/>
+                </a:solidFill>
+                <a:latin typeface="맑은 고딕"/>
+                <a:ea typeface="맑은 고딕"/>
+              </a:rPr>
+              <a:t>«node» D 노드</a:t>
+            </a:r>
+          </a:p>
+        </p:txBody>
+      </p:sp>
+      <p:sp>
+        <p:nvSpPr>
+          <p:cNvPr id="148" name="Rectangle 147"/>
+          <p:cNvSpPr/>
+          <p:nvPr/>
+        </p:nvSpPr>
+        <p:spPr>
+          <a:xfrm>
+            <a:off x="5029200" y="2514600"/>
+            <a:ext cx="1188720" cy="365760"/>
+          </a:xfrm>
+          <a:prstGeom prst="rect">
+            <a:avLst/>
+          </a:prstGeom>
+          <a:solidFill>
+            <a:srgbClr val="DAE3F3"/>
+          </a:solidFill>
+          <a:ln w="12700">
+            <a:solidFill>
+              <a:srgbClr val="2F5597"/>
+            </a:solidFill>
+          </a:ln>
+          <a:effectLst/>
+        </p:spPr>
+        <p:style>
+          <a:lnRef idx="1">
+            <a:schemeClr val="accent1"/>
+          </a:lnRef>
+          <a:fillRef idx="3">
+            <a:schemeClr val="accent1"/>
+          </a:fillRef>
+          <a:effectRef idx="2">
+            <a:schemeClr val="accent1"/>
+          </a:effectRef>
+          <a:fontRef idx="minor">
+            <a:schemeClr val="lt1"/>
+          </a:fontRef>
+        </p:style>
+        <p:txBody>
+          <a:bodyPr rtlCol="0" anchor="ctr" wrap="square" lIns="64008" tIns="18288" rIns="27432" bIns="18288"/>
+          <a:lstStyle/>
+          <a:p>
+            <a:pPr algn="ctr"/>
+            <a:r>
+              <a:rPr sz="750" b="1" i="0">
+                <a:solidFill>
+                  <a:srgbClr val="000000"/>
+                </a:solidFill>
+                <a:latin typeface="맑은 고딕"/>
+                <a:ea typeface="맑은 고딕"/>
+              </a:rPr>
+              <a:t>vLLM + KV 커넥터</a:t>
+            </a:r>
+          </a:p>
+        </p:txBody>
+      </p:sp>
+      <p:sp>
+        <p:nvSpPr>
+          <p:cNvPr id="149" name="Rectangle 148"/>
+          <p:cNvSpPr/>
+          <p:nvPr/>
+        </p:nvSpPr>
+        <p:spPr>
+          <a:xfrm>
+            <a:off x="4983480" y="2569464"/>
+            <a:ext cx="91440" cy="50292"/>
+          </a:xfrm>
+          <a:prstGeom prst="rect">
+            <a:avLst/>
+          </a:prstGeom>
+          <a:solidFill>
+            <a:srgbClr val="DAE3F3"/>
+          </a:solidFill>
+          <a:ln w="9525">
+            <a:solidFill>
+              <a:srgbClr val="2F5597"/>
+            </a:solidFill>
+          </a:ln>
+          <a:effectLst/>
+        </p:spPr>
+        <p:style>
+          <a:lnRef idx="1">
+            <a:schemeClr val="accent1"/>
+          </a:lnRef>
+          <a:fillRef idx="3">
+            <a:schemeClr val="accent1"/>
+          </a:fillRef>
+          <a:effectRef idx="2">
+            <a:schemeClr val="accent1"/>
+          </a:effectRef>
+          <a:fontRef idx="minor">
+            <a:schemeClr val="lt1"/>
+          </a:fontRef>
+        </p:style>
+        <p:txBody>
+          <a:bodyPr rtlCol="0" anchor="ctr" wrap="square" lIns="36576" tIns="18288" rIns="36576" bIns="18288"/>
+          <a:lstStyle/>
+          <a:p>
+            <a:pPr algn="ctr"/>
+            <a:r>
+              <a:rPr sz="800" b="0" i="0">
+                <a:solidFill>
+                  <a:srgbClr val="000000"/>
+                </a:solidFill>
+                <a:latin typeface="맑은 고딕"/>
+                <a:ea typeface="맑은 고딕"/>
+              </a:rPr>
+              <a:t/>
+            </a:r>
+          </a:p>
+        </p:txBody>
+      </p:sp>
+      <p:sp>
+        <p:nvSpPr>
+          <p:cNvPr id="150" name="Rectangle 149"/>
+          <p:cNvSpPr/>
+          <p:nvPr/>
+        </p:nvSpPr>
+        <p:spPr>
+          <a:xfrm>
+            <a:off x="4983480" y="2660904"/>
+            <a:ext cx="91440" cy="50292"/>
+          </a:xfrm>
+          <a:prstGeom prst="rect">
+            <a:avLst/>
+          </a:prstGeom>
+          <a:solidFill>
+            <a:srgbClr val="DAE3F3"/>
+          </a:solidFill>
+          <a:ln w="9525">
+            <a:solidFill>
+              <a:srgbClr val="2F5597"/>
+            </a:solidFill>
+          </a:ln>
+          <a:effectLst/>
+        </p:spPr>
+        <p:style>
+          <a:lnRef idx="1">
+            <a:schemeClr val="accent1"/>
+          </a:lnRef>
+          <a:fillRef idx="3">
+            <a:schemeClr val="accent1"/>
+          </a:fillRef>
+          <a:effectRef idx="2">
+            <a:schemeClr val="accent1"/>
+          </a:effectRef>
+          <a:fontRef idx="minor">
+            <a:schemeClr val="lt1"/>
+          </a:fontRef>
+        </p:style>
+        <p:txBody>
+          <a:bodyPr rtlCol="0" anchor="ctr" wrap="square" lIns="36576" tIns="18288" rIns="36576" bIns="18288"/>
+          <a:lstStyle/>
+          <a:p>
+            <a:pPr algn="ctr"/>
+            <a:r>
+              <a:rPr sz="800" b="0" i="0">
+                <a:solidFill>
+                  <a:srgbClr val="000000"/>
+                </a:solidFill>
+                <a:latin typeface="맑은 고딕"/>
+                <a:ea typeface="맑은 고딕"/>
+              </a:rPr>
+              <a:t/>
+            </a:r>
+          </a:p>
+        </p:txBody>
+      </p:sp>
+      <p:sp>
+        <p:nvSpPr>
+          <p:cNvPr id="151" name="Rectangle 150"/>
+          <p:cNvSpPr/>
+          <p:nvPr/>
+        </p:nvSpPr>
+        <p:spPr>
+          <a:xfrm>
+            <a:off x="5029200" y="2953512"/>
+            <a:ext cx="1188720" cy="274320"/>
+          </a:xfrm>
+          <a:prstGeom prst="rect">
+            <a:avLst/>
+          </a:prstGeom>
+          <a:solidFill>
+            <a:srgbClr val="F2F2F2"/>
+          </a:solidFill>
+          <a:ln w="12700">
+            <a:solidFill>
+              <a:srgbClr val="7F7F7F"/>
+            </a:solidFill>
+          </a:ln>
+          <a:effectLst/>
+        </p:spPr>
+        <p:style>
+          <a:lnRef idx="1">
+            <a:schemeClr val="accent1"/>
+          </a:lnRef>
+          <a:fillRef idx="3">
+            <a:schemeClr val="accent1"/>
+          </a:fillRef>
+          <a:effectRef idx="2">
+            <a:schemeClr val="accent1"/>
+          </a:effectRef>
+          <a:fontRef idx="minor">
+            <a:schemeClr val="lt1"/>
+          </a:fontRef>
+        </p:style>
+        <p:txBody>
+          <a:bodyPr rtlCol="0" anchor="ctr" wrap="square" lIns="36576" tIns="18288" rIns="36576" bIns="18288"/>
+          <a:lstStyle/>
+          <a:p>
+            <a:pPr algn="ctr"/>
+            <a:r>
+              <a:rPr sz="650" b="0" i="0">
+                <a:solidFill>
+                  <a:srgbClr val="000000"/>
+                </a:solidFill>
+                <a:latin typeface="맑은 고딕"/>
+                <a:ea typeface="맑은 고딕"/>
+              </a:rPr>
+              <a:t>GPU DMA · CPU flush</a:t>
+            </a:r>
+          </a:p>
+        </p:txBody>
+      </p:sp>
+      <p:sp>
+        <p:nvSpPr>
+          <p:cNvPr id="152" name="Rectangle 151"/>
+          <p:cNvSpPr/>
+          <p:nvPr/>
+        </p:nvSpPr>
+        <p:spPr>
+          <a:xfrm>
+            <a:off x="2953512" y="2148840"/>
+            <a:ext cx="1874519" cy="1965960"/>
+          </a:xfrm>
+          <a:prstGeom prst="rect">
+            <a:avLst/>
+          </a:prstGeom>
+          <a:solidFill>
+            <a:srgbClr val="FFF8F3"/>
+          </a:solidFill>
+          <a:ln w="15875">
+            <a:solidFill>
+              <a:srgbClr val="C55A11"/>
+            </a:solidFill>
+          </a:ln>
+          <a:effectLst/>
+        </p:spPr>
+        <p:style>
+          <a:lnRef idx="1">
+            <a:schemeClr val="accent1"/>
+          </a:lnRef>
+          <a:fillRef idx="3">
+            <a:schemeClr val="accent1"/>
+          </a:fillRef>
+          <a:effectRef idx="2">
+            <a:schemeClr val="accent1"/>
+          </a:effectRef>
+          <a:fontRef idx="minor">
+            <a:schemeClr val="lt1"/>
+          </a:fontRef>
+        </p:style>
+        <p:txBody>
+          <a:bodyPr rtlCol="0" anchor="ctr" wrap="square" lIns="36576" tIns="18288" rIns="36576" bIns="18288"/>
+          <a:lstStyle/>
+          <a:p>
+            <a:pPr algn="ctr"/>
+            <a:r>
+              <a:rPr sz="800" b="0" i="0">
+                <a:solidFill>
+                  <a:srgbClr val="000000"/>
+                </a:solidFill>
+                <a:latin typeface="맑은 고딕"/>
+                <a:ea typeface="맑은 고딕"/>
+              </a:rPr>
+              <a:t/>
+            </a:r>
+          </a:p>
+        </p:txBody>
+      </p:sp>
+      <p:sp>
+        <p:nvSpPr>
+          <p:cNvPr id="153" name="Rectangle 152"/>
+          <p:cNvSpPr/>
+          <p:nvPr/>
+        </p:nvSpPr>
+        <p:spPr>
+          <a:xfrm>
+            <a:off x="2953512" y="2148840"/>
+            <a:ext cx="1415491" cy="173736"/>
+          </a:xfrm>
+          <a:prstGeom prst="rect">
+            <a:avLst/>
+          </a:prstGeom>
+          <a:solidFill>
+            <a:srgbClr val="C55A11"/>
+          </a:solidFill>
+          <a:ln w="12700">
+            <a:solidFill>
+              <a:srgbClr val="C55A11"/>
+            </a:solidFill>
+          </a:ln>
+          <a:effectLst/>
+        </p:spPr>
+        <p:style>
+          <a:lnRef idx="1">
+            <a:schemeClr val="accent1"/>
+          </a:lnRef>
+          <a:fillRef idx="3">
+            <a:schemeClr val="accent1"/>
+          </a:fillRef>
+          <a:effectRef idx="2">
+            <a:schemeClr val="accent1"/>
+          </a:effectRef>
+          <a:fontRef idx="minor">
+            <a:schemeClr val="lt1"/>
+          </a:fontRef>
+        </p:style>
+        <p:txBody>
+          <a:bodyPr rtlCol="0" anchor="ctr" wrap="square" lIns="45720" tIns="0" rIns="18288" bIns="0"/>
+          <a:lstStyle/>
+          <a:p>
+            <a:pPr algn="l"/>
+            <a:r>
+              <a:rPr sz="700" b="1" i="0">
+                <a:solidFill>
+                  <a:srgbClr val="FFFFFF"/>
+                </a:solidFill>
+                <a:latin typeface="맑은 고딕"/>
+                <a:ea typeface="맑은 고딕"/>
+              </a:rPr>
+              <a:t>«store» 비일관 CXL 공유 풀</a:t>
+            </a:r>
+          </a:p>
+        </p:txBody>
+      </p:sp>
+      <p:sp>
+        <p:nvSpPr>
+          <p:cNvPr id="154" name="Rectangle 153"/>
+          <p:cNvSpPr/>
+          <p:nvPr/>
+        </p:nvSpPr>
+        <p:spPr>
+          <a:xfrm>
+            <a:off x="3044952" y="2468880"/>
+            <a:ext cx="1691640" cy="292608"/>
+          </a:xfrm>
+          <a:prstGeom prst="rect">
+            <a:avLst/>
+          </a:prstGeom>
+          <a:solidFill>
+            <a:srgbClr val="FBE5D6"/>
+          </a:solidFill>
+          <a:ln w="12700">
+            <a:solidFill>
+              <a:srgbClr val="C55A11"/>
+            </a:solidFill>
+          </a:ln>
+          <a:effectLst/>
+        </p:spPr>
+        <p:style>
+          <a:lnRef idx="1">
+            <a:schemeClr val="accent1"/>
+          </a:lnRef>
+          <a:fillRef idx="3">
+            <a:schemeClr val="accent1"/>
+          </a:fillRef>
+          <a:effectRef idx="2">
+            <a:schemeClr val="accent1"/>
+          </a:effectRef>
+          <a:fontRef idx="minor">
+            <a:schemeClr val="lt1"/>
+          </a:fontRef>
+        </p:style>
+        <p:txBody>
+          <a:bodyPr rtlCol="0" anchor="ctr" wrap="square" lIns="36576" tIns="18288" rIns="36576" bIns="18288"/>
+          <a:lstStyle/>
+          <a:p>
+            <a:pPr algn="ctr"/>
+            <a:r>
+              <a:rPr sz="700" b="0" i="0">
+                <a:solidFill>
+                  <a:srgbClr val="000000"/>
+                </a:solidFill>
+                <a:latin typeface="맑은 고딕"/>
+                <a:ea typeface="맑은 고딕"/>
+              </a:rPr>
+              <a:t>KV 블록 (불변·해시 식별)</a:t>
+            </a:r>
+          </a:p>
+        </p:txBody>
+      </p:sp>
+      <p:sp>
+        <p:nvSpPr>
+          <p:cNvPr id="155" name="Rectangle 154"/>
+          <p:cNvSpPr/>
+          <p:nvPr/>
+        </p:nvSpPr>
+        <p:spPr>
+          <a:xfrm>
+            <a:off x="3044952" y="2852928"/>
+            <a:ext cx="1691640" cy="310896"/>
+          </a:xfrm>
+          <a:prstGeom prst="rect">
+            <a:avLst/>
+          </a:prstGeom>
+          <a:solidFill>
+            <a:srgbClr val="FBE5D6"/>
+          </a:solidFill>
+          <a:ln w="12700">
+            <a:solidFill>
+              <a:srgbClr val="C55A11"/>
+            </a:solidFill>
+          </a:ln>
+          <a:effectLst/>
+        </p:spPr>
+        <p:style>
+          <a:lnRef idx="1">
+            <a:schemeClr val="accent1"/>
+          </a:lnRef>
+          <a:fillRef idx="3">
+            <a:schemeClr val="accent1"/>
+          </a:fillRef>
+          <a:effectRef idx="2">
+            <a:schemeClr val="accent1"/>
+          </a:effectRef>
+          <a:fontRef idx="minor">
+            <a:schemeClr val="lt1"/>
+          </a:fontRef>
+        </p:style>
+        <p:txBody>
+          <a:bodyPr rtlCol="0" anchor="ctr" wrap="square" lIns="36576" tIns="18288" rIns="36576" bIns="18288"/>
+          <a:lstStyle/>
+          <a:p>
+            <a:pPr algn="ctr"/>
+            <a:r>
+              <a:rPr sz="700" b="0" i="0">
+                <a:solidFill>
+                  <a:srgbClr val="000000"/>
+                </a:solidFill>
+                <a:latin typeface="맑은 고딕"/>
+                <a:ea typeface="맑은 고딕"/>
+              </a:rPr>
+              <a:t>요청/응답 슬롯 (flag)</a:t>
+            </a:r>
+          </a:p>
+        </p:txBody>
+      </p:sp>
+      <p:sp>
+        <p:nvSpPr>
+          <p:cNvPr id="156" name="Rectangle 155"/>
+          <p:cNvSpPr/>
+          <p:nvPr/>
+        </p:nvSpPr>
+        <p:spPr>
+          <a:xfrm>
+            <a:off x="3044952" y="3310128"/>
+            <a:ext cx="1691640" cy="640080"/>
+          </a:xfrm>
+          <a:prstGeom prst="rect">
+            <a:avLst/>
+          </a:prstGeom>
+          <a:solidFill>
+            <a:srgbClr val="FDECEA"/>
+          </a:solidFill>
+          <a:ln w="12700">
+            <a:solidFill>
+              <a:srgbClr val="C00000"/>
+            </a:solidFill>
+          </a:ln>
+          <a:effectLst/>
+        </p:spPr>
+        <p:style>
+          <a:lnRef idx="1">
+            <a:schemeClr val="accent1"/>
+          </a:lnRef>
+          <a:fillRef idx="3">
+            <a:schemeClr val="accent1"/>
+          </a:fillRef>
+          <a:effectRef idx="2">
+            <a:schemeClr val="accent1"/>
+          </a:effectRef>
+          <a:fontRef idx="minor">
+            <a:schemeClr val="lt1"/>
+          </a:fontRef>
+        </p:style>
+        <p:txBody>
+          <a:bodyPr rtlCol="0" anchor="ctr" wrap="square" lIns="64008" tIns="18288" rIns="27432" bIns="18288"/>
+          <a:lstStyle/>
+          <a:p>
+            <a:pPr algn="ctr"/>
+            <a:r>
+              <a:rPr sz="750" b="1" i="0">
+                <a:solidFill>
+                  <a:srgbClr val="000000"/>
+                </a:solidFill>
+                <a:latin typeface="맑은 고딕"/>
+                <a:ea typeface="맑은 고딕"/>
+              </a:rPr>
+              <a:t>메타데이터 서버 (단일)</a:t>
+            </a:r>
+          </a:p>
+          <a:p>
+            <a:pPr algn="ctr"/>
+            <a:r>
+              <a:rPr sz="700" b="0" i="0">
+                <a:solidFill>
+                  <a:srgbClr val="000000"/>
+                </a:solidFill>
+                <a:latin typeface="맑은 고딕"/>
+                <a:ea typeface="맑은 고딕"/>
+              </a:rPr>
+              <a:t>prefix index · refcount</a:t>
+            </a:r>
+          </a:p>
+          <a:p>
+            <a:pPr algn="ctr"/>
+            <a:r>
+              <a:rPr sz="700" b="0" i="0">
+                <a:solidFill>
+                  <a:srgbClr val="000000"/>
+                </a:solidFill>
+                <a:latin typeface="맑은 고딕"/>
+                <a:ea typeface="맑은 고딕"/>
+              </a:rPr>
+              <a:t>allocator · LRU 직렬화</a:t>
+            </a:r>
+          </a:p>
+        </p:txBody>
+      </p:sp>
+      <p:sp>
+        <p:nvSpPr>
+          <p:cNvPr id="157" name="Rectangle 156"/>
+          <p:cNvSpPr/>
+          <p:nvPr/>
+        </p:nvSpPr>
+        <p:spPr>
+          <a:xfrm>
+            <a:off x="2999232" y="3364992"/>
+            <a:ext cx="91440" cy="50292"/>
+          </a:xfrm>
+          <a:prstGeom prst="rect">
+            <a:avLst/>
+          </a:prstGeom>
+          <a:solidFill>
+            <a:srgbClr val="FDECEA"/>
+          </a:solidFill>
+          <a:ln w="9525">
+            <a:solidFill>
+              <a:srgbClr val="C00000"/>
+            </a:solidFill>
+          </a:ln>
+          <a:effectLst/>
+        </p:spPr>
+        <p:style>
+          <a:lnRef idx="1">
+            <a:schemeClr val="accent1"/>
+          </a:lnRef>
+          <a:fillRef idx="3">
+            <a:schemeClr val="accent1"/>
+          </a:fillRef>
+          <a:effectRef idx="2">
+            <a:schemeClr val="accent1"/>
+          </a:effectRef>
+          <a:fontRef idx="minor">
+            <a:schemeClr val="lt1"/>
+          </a:fontRef>
+        </p:style>
+        <p:txBody>
+          <a:bodyPr rtlCol="0" anchor="ctr" wrap="square" lIns="36576" tIns="18288" rIns="36576" bIns="18288"/>
+          <a:lstStyle/>
+          <a:p>
+            <a:pPr algn="ctr"/>
+            <a:r>
+              <a:rPr sz="800" b="0" i="0">
+                <a:solidFill>
+                  <a:srgbClr val="000000"/>
+                </a:solidFill>
+                <a:latin typeface="맑은 고딕"/>
+                <a:ea typeface="맑은 고딕"/>
+              </a:rPr>
+              <a:t/>
+            </a:r>
+          </a:p>
+        </p:txBody>
+      </p:sp>
+      <p:sp>
+        <p:nvSpPr>
+          <p:cNvPr id="158" name="Rectangle 157"/>
+          <p:cNvSpPr/>
+          <p:nvPr/>
+        </p:nvSpPr>
+        <p:spPr>
+          <a:xfrm>
+            <a:off x="2999232" y="3456432"/>
+            <a:ext cx="91440" cy="50292"/>
+          </a:xfrm>
+          <a:prstGeom prst="rect">
+            <a:avLst/>
+          </a:prstGeom>
+          <a:solidFill>
+            <a:srgbClr val="FDECEA"/>
+          </a:solidFill>
+          <a:ln w="9525">
+            <a:solidFill>
+              <a:srgbClr val="C00000"/>
+            </a:solidFill>
+          </a:ln>
+          <a:effectLst/>
+        </p:spPr>
+        <p:style>
+          <a:lnRef idx="1">
+            <a:schemeClr val="accent1"/>
+          </a:lnRef>
+          <a:fillRef idx="3">
+            <a:schemeClr val="accent1"/>
+          </a:fillRef>
+          <a:effectRef idx="2">
+            <a:schemeClr val="accent1"/>
+          </a:effectRef>
+          <a:fontRef idx="minor">
+            <a:schemeClr val="lt1"/>
+          </a:fontRef>
+        </p:style>
+        <p:txBody>
+          <a:bodyPr rtlCol="0" anchor="ctr" wrap="square" lIns="36576" tIns="18288" rIns="36576" bIns="18288"/>
+          <a:lstStyle/>
+          <a:p>
+            <a:pPr algn="ctr"/>
+            <a:r>
+              <a:rPr sz="800" b="0" i="0">
+                <a:solidFill>
+                  <a:srgbClr val="000000"/>
+                </a:solidFill>
+                <a:latin typeface="맑은 고딕"/>
+                <a:ea typeface="맑은 고딕"/>
+              </a:rPr>
+              <a:t/>
+            </a:r>
+          </a:p>
+        </p:txBody>
+      </p:sp>
+      <p:cxnSp>
+        <p:nvCxnSpPr>
+          <p:cNvPr id="159" name="Connector 158"/>
+          <p:cNvCxnSpPr/>
+          <p:nvPr/>
+        </p:nvCxnSpPr>
+        <p:spPr>
+          <a:xfrm>
+            <a:off x="2679191" y="2926080"/>
+            <a:ext cx="365761" cy="0"/>
+          </a:xfrm>
+          <a:prstGeom prst="line">
+            <a:avLst/>
+          </a:prstGeom>
+          <a:ln w="15875">
+            <a:solidFill>
+              <a:srgbClr val="2F5597"/>
+            </a:solidFill>
+            <a:tailEnd type="triangle"/>
+          </a:ln>
+        </p:spPr>
+        <p:style>
+          <a:lnRef idx="2">
+            <a:schemeClr val="accent1"/>
+          </a:lnRef>
+          <a:fillRef idx="0">
+            <a:schemeClr val="accent1"/>
+          </a:fillRef>
+          <a:effectRef idx="1">
+            <a:schemeClr val="accent1"/>
+          </a:effectRef>
+          <a:fontRef idx="minor">
+            <a:schemeClr val="tx1"/>
+          </a:fontRef>
+        </p:style>
+      </p:cxnSp>
+      <p:sp>
+        <p:nvSpPr>
+          <p:cNvPr id="160" name="Oval 159"/>
+          <p:cNvSpPr/>
+          <p:nvPr/>
+        </p:nvSpPr>
+        <p:spPr>
+          <a:xfrm>
+            <a:off x="2784348" y="2848356"/>
+            <a:ext cx="155448" cy="155448"/>
+          </a:xfrm>
+          <a:prstGeom prst="ellipse">
+            <a:avLst/>
+          </a:prstGeom>
+          <a:solidFill>
+            <a:srgbClr val="2F5597"/>
+          </a:solidFill>
+          <a:ln w="9525">
+            <a:solidFill>
+              <a:srgbClr val="FFFFFF"/>
+            </a:solidFill>
+          </a:ln>
+          <a:effectLst/>
+        </p:spPr>
+        <p:style>
+          <a:lnRef idx="1">
+            <a:schemeClr val="accent1"/>
+          </a:lnRef>
+          <a:fillRef idx="3">
+            <a:schemeClr val="accent1"/>
+          </a:fillRef>
+          <a:effectRef idx="2">
+            <a:schemeClr val="accent1"/>
+          </a:effectRef>
+          <a:fontRef idx="minor">
+            <a:schemeClr val="lt1"/>
+          </a:fontRef>
+        </p:style>
+        <p:txBody>
+          <a:bodyPr rtlCol="0" anchor="ctr" wrap="square" lIns="0" tIns="0" rIns="0" bIns="0"/>
+          <a:lstStyle/>
+          <a:p>
+            <a:pPr algn="ctr"/>
+            <a:r>
+              <a:rPr sz="650" b="1" i="0">
+                <a:solidFill>
+                  <a:srgbClr val="FFFFFF"/>
+                </a:solidFill>
+                <a:latin typeface="맑은 고딕"/>
+                <a:ea typeface="맑은 고딕"/>
+              </a:rPr>
+              <a:t>1</a:t>
+            </a:r>
+          </a:p>
+        </p:txBody>
+      </p:sp>
+      <p:cxnSp>
+        <p:nvCxnSpPr>
+          <p:cNvPr id="161" name="Connector 160"/>
+          <p:cNvCxnSpPr/>
+          <p:nvPr/>
+        </p:nvCxnSpPr>
+        <p:spPr>
+          <a:xfrm flipH="1">
+            <a:off x="4736592" y="2926080"/>
+            <a:ext cx="182880" cy="0"/>
+          </a:xfrm>
+          <a:prstGeom prst="line">
+            <a:avLst/>
+          </a:prstGeom>
+          <a:ln w="15875">
+            <a:solidFill>
+              <a:srgbClr val="2F5597"/>
+            </a:solidFill>
+            <a:tailEnd type="triangle"/>
+          </a:ln>
+        </p:spPr>
+        <p:style>
+          <a:lnRef idx="2">
+            <a:schemeClr val="accent1"/>
+          </a:lnRef>
+          <a:fillRef idx="0">
+            <a:schemeClr val="accent1"/>
+          </a:fillRef>
+          <a:effectRef idx="1">
+            <a:schemeClr val="accent1"/>
+          </a:effectRef>
+          <a:fontRef idx="minor">
+            <a:schemeClr val="tx1"/>
+          </a:fontRef>
+        </p:style>
+      </p:cxnSp>
+      <p:sp>
+        <p:nvSpPr>
+          <p:cNvPr id="162" name="Oval 161"/>
+          <p:cNvSpPr/>
+          <p:nvPr/>
+        </p:nvSpPr>
+        <p:spPr>
+          <a:xfrm>
+            <a:off x="4750307" y="2848356"/>
+            <a:ext cx="155448" cy="155448"/>
+          </a:xfrm>
+          <a:prstGeom prst="ellipse">
+            <a:avLst/>
+          </a:prstGeom>
+          <a:solidFill>
+            <a:srgbClr val="2F5597"/>
+          </a:solidFill>
+          <a:ln w="9525">
+            <a:solidFill>
+              <a:srgbClr val="FFFFFF"/>
+            </a:solidFill>
+          </a:ln>
+          <a:effectLst/>
+        </p:spPr>
+        <p:style>
+          <a:lnRef idx="1">
+            <a:schemeClr val="accent1"/>
+          </a:lnRef>
+          <a:fillRef idx="3">
+            <a:schemeClr val="accent1"/>
+          </a:fillRef>
+          <a:effectRef idx="2">
+            <a:schemeClr val="accent1"/>
+          </a:effectRef>
+          <a:fontRef idx="minor">
+            <a:schemeClr val="lt1"/>
+          </a:fontRef>
+        </p:style>
+        <p:txBody>
+          <a:bodyPr rtlCol="0" anchor="ctr" wrap="square" lIns="0" tIns="0" rIns="0" bIns="0"/>
+          <a:lstStyle/>
+          <a:p>
+            <a:pPr algn="ctr"/>
+            <a:r>
+              <a:rPr sz="650" b="1" i="0">
+                <a:solidFill>
+                  <a:srgbClr val="FFFFFF"/>
+                </a:solidFill>
+                <a:latin typeface="맑은 고딕"/>
+                <a:ea typeface="맑은 고딕"/>
+              </a:rPr>
+              <a:t>1</a:t>
+            </a:r>
+          </a:p>
+        </p:txBody>
+      </p:sp>
+      <p:sp>
+        <p:nvSpPr>
+          <p:cNvPr id="163" name="Rounded Rectangle 162"/>
+          <p:cNvSpPr/>
+          <p:nvPr/>
+        </p:nvSpPr>
+        <p:spPr>
+          <a:xfrm>
+            <a:off x="1243584" y="4224528"/>
             <a:ext cx="329184" cy="155448"/>
           </a:xfrm>
           <a:prstGeom prst="roundRect">
@@ -9174,14 +10398,300 @@
       </p:sp>
       <p:sp>
         <p:nvSpPr>
-          <p:cNvPr id="141" name="Rectangle 140"/>
+          <p:cNvPr id="164" name="TextBox 163"/>
+          <p:cNvSpPr txBox="1"/>
+          <p:nvPr/>
+        </p:nvSpPr>
+        <p:spPr>
+          <a:xfrm>
+            <a:off x="1627632" y="4206240"/>
+            <a:ext cx="4846320" cy="182880"/>
+          </a:xfrm>
+          <a:prstGeom prst="rect">
+            <a:avLst/>
+          </a:prstGeom>
+          <a:noFill/>
+        </p:spPr>
+        <p:txBody>
+          <a:bodyPr wrap="square" lIns="0" tIns="0" rIns="0" bIns="0" anchor="t">
+            <a:spAutoFit/>
+          </a:bodyPr>
+          <a:lstStyle/>
+          <a:p>
+            <a:pPr algn="l"/>
+            <a:r>
+              <a:rPr sz="700" b="0" i="0">
+                <a:solidFill>
+                  <a:srgbClr val="404040"/>
+                </a:solidFill>
+                <a:latin typeface="맑은 고딕"/>
+                <a:ea typeface="맑은 고딕"/>
+              </a:rPr>
+              <a:t>KV 공유 풀이 있을 때 Tmove가 줄어드는 전제를 DP4가 안전하게 만듦</a:t>
+            </a:r>
+          </a:p>
+        </p:txBody>
+      </p:sp>
+      <p:sp>
+        <p:nvSpPr>
+          <p:cNvPr id="165" name="Rounded Rectangle 164"/>
           <p:cNvSpPr/>
           <p:nvPr/>
         </p:nvSpPr>
         <p:spPr>
           <a:xfrm>
-            <a:off x="1216152" y="2286000"/>
-            <a:ext cx="1737360" cy="1691640"/>
+            <a:off x="1243584" y="4443984"/>
+            <a:ext cx="329184" cy="155448"/>
+          </a:xfrm>
+          <a:prstGeom prst="roundRect">
+            <a:avLst/>
+          </a:prstGeom>
+          <a:solidFill>
+            <a:srgbClr val="404040"/>
+          </a:solidFill>
+          <a:ln w="12700">
+            <a:solidFill>
+              <a:srgbClr val="404040"/>
+            </a:solidFill>
+          </a:ln>
+          <a:effectLst/>
+        </p:spPr>
+        <p:style>
+          <a:lnRef idx="1">
+            <a:schemeClr val="accent1"/>
+          </a:lnRef>
+          <a:fillRef idx="3">
+            <a:schemeClr val="accent1"/>
+          </a:fillRef>
+          <a:effectRef idx="2">
+            <a:schemeClr val="accent1"/>
+          </a:effectRef>
+          <a:fontRef idx="minor">
+            <a:schemeClr val="lt1"/>
+          </a:fontRef>
+        </p:style>
+        <p:txBody>
+          <a:bodyPr rtlCol="0" anchor="ctr" wrap="square" lIns="0" tIns="0" rIns="0" bIns="0"/>
+          <a:lstStyle/>
+          <a:p>
+            <a:pPr algn="ctr"/>
+            <a:r>
+              <a:rPr sz="650" b="1" i="0">
+                <a:solidFill>
+                  <a:srgbClr val="FFFFFF"/>
+                </a:solidFill>
+                <a:latin typeface="맑은 고딕"/>
+                <a:ea typeface="맑은 고딕"/>
+              </a:rPr>
+              <a:t>DP3</a:t>
+            </a:r>
+          </a:p>
+        </p:txBody>
+      </p:sp>
+      <p:sp>
+        <p:nvSpPr>
+          <p:cNvPr id="166" name="TextBox 165"/>
+          <p:cNvSpPr txBox="1"/>
+          <p:nvPr/>
+        </p:nvSpPr>
+        <p:spPr>
+          <a:xfrm>
+            <a:off x="1627632" y="4425696"/>
+            <a:ext cx="4846320" cy="182880"/>
+          </a:xfrm>
+          <a:prstGeom prst="rect">
+            <a:avLst/>
+          </a:prstGeom>
+          <a:noFill/>
+        </p:spPr>
+        <p:txBody>
+          <a:bodyPr wrap="square" lIns="0" tIns="0" rIns="0" bIns="0" anchor="t">
+            <a:spAutoFit/>
+          </a:bodyPr>
+          <a:lstStyle/>
+          <a:p>
+            <a:pPr algn="l"/>
+            <a:r>
+              <a:rPr sz="700" b="0" i="0">
+                <a:solidFill>
+                  <a:srgbClr val="404040"/>
+                </a:solidFill>
+                <a:latin typeface="맑은 고딕"/>
+                <a:ea typeface="맑은 고딕"/>
+              </a:rPr>
+              <a:t>Comp.KV도 같은 블록 의미(불변·해시)로 공유되어 같은 경로를 사용</a:t>
+            </a:r>
+          </a:p>
+        </p:txBody>
+      </p:sp>
+      <p:sp>
+        <p:nvSpPr>
+          <p:cNvPr id="167" name="Rounded Rectangle 166"/>
+          <p:cNvSpPr/>
+          <p:nvPr/>
+        </p:nvSpPr>
+        <p:spPr>
+          <a:xfrm>
+            <a:off x="1243584" y="4663440"/>
+            <a:ext cx="329184" cy="155448"/>
+          </a:xfrm>
+          <a:prstGeom prst="roundRect">
+            <a:avLst/>
+          </a:prstGeom>
+          <a:solidFill>
+            <a:srgbClr val="404040"/>
+          </a:solidFill>
+          <a:ln w="12700">
+            <a:solidFill>
+              <a:srgbClr val="404040"/>
+            </a:solidFill>
+          </a:ln>
+          <a:effectLst/>
+        </p:spPr>
+        <p:style>
+          <a:lnRef idx="1">
+            <a:schemeClr val="accent1"/>
+          </a:lnRef>
+          <a:fillRef idx="3">
+            <a:schemeClr val="accent1"/>
+          </a:fillRef>
+          <a:effectRef idx="2">
+            <a:schemeClr val="accent1"/>
+          </a:effectRef>
+          <a:fontRef idx="minor">
+            <a:schemeClr val="lt1"/>
+          </a:fontRef>
+        </p:style>
+        <p:txBody>
+          <a:bodyPr rtlCol="0" anchor="ctr" wrap="square" lIns="0" tIns="0" rIns="0" bIns="0"/>
+          <a:lstStyle/>
+          <a:p>
+            <a:pPr algn="ctr"/>
+            <a:r>
+              <a:rPr sz="650" b="1" i="0">
+                <a:solidFill>
+                  <a:srgbClr val="FFFFFF"/>
+                </a:solidFill>
+                <a:latin typeface="맑은 고딕"/>
+                <a:ea typeface="맑은 고딕"/>
+              </a:rPr>
+              <a:t>DP1</a:t>
+            </a:r>
+          </a:p>
+        </p:txBody>
+      </p:sp>
+      <p:sp>
+        <p:nvSpPr>
+          <p:cNvPr id="168" name="TextBox 167"/>
+          <p:cNvSpPr txBox="1"/>
+          <p:nvPr/>
+        </p:nvSpPr>
+        <p:spPr>
+          <a:xfrm>
+            <a:off x="1627632" y="4645152"/>
+            <a:ext cx="4846320" cy="182880"/>
+          </a:xfrm>
+          <a:prstGeom prst="rect">
+            <a:avLst/>
+          </a:prstGeom>
+          <a:noFill/>
+        </p:spPr>
+        <p:txBody>
+          <a:bodyPr wrap="square" lIns="0" tIns="0" rIns="0" bIns="0" anchor="t">
+            <a:spAutoFit/>
+          </a:bodyPr>
+          <a:lstStyle/>
+          <a:p>
+            <a:pPr algn="l"/>
+            <a:r>
+              <a:rPr sz="700" b="0" i="0">
+                <a:solidFill>
+                  <a:srgbClr val="404040"/>
+                </a:solidFill>
+                <a:latin typeface="맑은 고딕"/>
+                <a:ea typeface="맑은 고딕"/>
+              </a:rPr>
+              <a:t>풀 tier는 DP1 백엔드 인터페이스의 한 backend로 접근</a:t>
+            </a:r>
+          </a:p>
+        </p:txBody>
+      </p:sp>
+      <p:sp>
+        <p:nvSpPr>
+          <p:cNvPr id="169" name="Rectangle 168"/>
+          <p:cNvSpPr/>
+          <p:nvPr/>
+        </p:nvSpPr>
+        <p:spPr>
+          <a:xfrm>
+            <a:off x="7406640" y="1764792"/>
+            <a:ext cx="3566160" cy="310896"/>
+          </a:xfrm>
+          <a:prstGeom prst="rect">
+            <a:avLst/>
+          </a:prstGeom>
+          <a:solidFill>
+            <a:srgbClr val="FFFFFF"/>
+          </a:solidFill>
+          <a:ln w="12700">
+            <a:solidFill>
+              <a:srgbClr val="404040"/>
+            </a:solidFill>
+          </a:ln>
+          <a:effectLst/>
+        </p:spPr>
+        <p:style>
+          <a:lnRef idx="1">
+            <a:schemeClr val="accent1"/>
+          </a:lnRef>
+          <a:fillRef idx="3">
+            <a:schemeClr val="accent1"/>
+          </a:fillRef>
+          <a:effectRef idx="2">
+            <a:schemeClr val="accent1"/>
+          </a:effectRef>
+          <a:fontRef idx="minor">
+            <a:schemeClr val="lt1"/>
+          </a:fontRef>
+        </p:style>
+        <p:txBody>
+          <a:bodyPr rtlCol="0" anchor="ctr" wrap="square" lIns="36576" tIns="18288" rIns="36576" bIns="18288"/>
+          <a:lstStyle/>
+          <a:p>
+            <a:pPr algn="ctr"/>
+            <a:r>
+              <a:rPr sz="700" b="1" i="0">
+                <a:solidFill>
+                  <a:srgbClr val="000000"/>
+                </a:solidFill>
+                <a:latin typeface="맑은 고딕"/>
+                <a:ea typeface="맑은 고딕"/>
+              </a:rPr>
+              <a:t>공통 전제</a:t>
+            </a:r>
+            <a:r>
+              <a:rPr sz="700" b="0" i="0">
+                <a:solidFill>
+                  <a:srgbClr val="000000"/>
+                </a:solidFill>
+                <a:latin typeface="맑은 고딕"/>
+                <a:ea typeface="맑은 고딕"/>
+              </a:rPr>
+              <a:t>: 페이로드는 DMA(캐시 우회) + publish를 가시성 경계로</a:t>
+            </a:r>
+          </a:p>
+        </p:txBody>
+      </p:sp>
+      <p:sp>
+        <p:nvSpPr>
+          <p:cNvPr id="170" name="Rectangle 169"/>
+          <p:cNvSpPr/>
+          <p:nvPr/>
+        </p:nvSpPr>
+        <p:spPr>
+          <a:xfrm>
+            <a:off x="6675120" y="2240280"/>
+            <a:ext cx="1417320" cy="1097280"/>
           </a:xfrm>
           <a:prstGeom prst="rect">
             <a:avLst/>
@@ -9230,14 +10740,14 @@
       </p:sp>
       <p:sp>
         <p:nvSpPr>
-          <p:cNvPr id="142" name="Rectangle 141"/>
+          <p:cNvPr id="171" name="Rectangle 170"/>
           <p:cNvSpPr/>
           <p:nvPr/>
         </p:nvSpPr>
         <p:spPr>
           <a:xfrm>
-            <a:off x="1216152" y="2286000"/>
-            <a:ext cx="1335024" cy="173736"/>
+            <a:off x="6675120" y="2240280"/>
+            <a:ext cx="822960" cy="173736"/>
           </a:xfrm>
           <a:prstGeom prst="rect">
             <a:avLst/>
@@ -9279,21 +10789,21 @@
                 <a:latin typeface="맑은 고딕"/>
                 <a:ea typeface="맑은 고딕"/>
               </a:rPr>
-              <a:t>«node» P 노드 (Prefill)</a:t>
-            </a:r>
-          </a:p>
-        </p:txBody>
-      </p:sp>
-      <p:sp>
-        <p:nvSpPr>
-          <p:cNvPr id="143" name="Rectangle 142"/>
+              <a:t>«node» P 노드</a:t>
+            </a:r>
+          </a:p>
+        </p:txBody>
+      </p:sp>
+      <p:sp>
+        <p:nvSpPr>
+          <p:cNvPr id="172" name="Rectangle 171"/>
           <p:cNvSpPr/>
           <p:nvPr/>
         </p:nvSpPr>
         <p:spPr>
           <a:xfrm>
-            <a:off x="1399032" y="2578608"/>
-            <a:ext cx="1417320" cy="457200"/>
+            <a:off x="6784848" y="2514600"/>
+            <a:ext cx="1188720" cy="365760"/>
           </a:xfrm>
           <a:prstGeom prst="rect">
             <a:avLst/>
@@ -9335,33 +10845,20 @@
                 <a:latin typeface="맑은 고딕"/>
                 <a:ea typeface="맑은 고딕"/>
               </a:rPr>
-              <a:t>vLLM 인스턴스</a:t>
-            </a:r>
-          </a:p>
-          <a:p>
-            <a:pPr algn="ctr"/>
-            <a:r>
-              <a:rPr sz="700" b="0" i="0">
-                <a:solidFill>
-                  <a:srgbClr val="000000"/>
-                </a:solidFill>
-                <a:latin typeface="맑은 고딕"/>
-                <a:ea typeface="맑은 고딕"/>
-              </a:rPr>
-              <a:t>DP1·DP2·DP3 노드 내 결정</a:t>
-            </a:r>
-          </a:p>
-        </p:txBody>
-      </p:sp>
-      <p:sp>
-        <p:nvSpPr>
-          <p:cNvPr id="144" name="Rectangle 143"/>
+              <a:t>vLLM + KV 커넥터</a:t>
+            </a:r>
+          </a:p>
+        </p:txBody>
+      </p:sp>
+      <p:sp>
+        <p:nvSpPr>
+          <p:cNvPr id="173" name="Rectangle 172"/>
           <p:cNvSpPr/>
           <p:nvPr/>
         </p:nvSpPr>
         <p:spPr>
           <a:xfrm>
-            <a:off x="1353312" y="2633472"/>
+            <a:off x="6739128" y="2569464"/>
             <a:ext cx="91440" cy="50292"/>
           </a:xfrm>
           <a:prstGeom prst="rect">
@@ -9411,13 +10908,13 @@
       </p:sp>
       <p:sp>
         <p:nvSpPr>
-          <p:cNvPr id="145" name="Rectangle 144"/>
+          <p:cNvPr id="174" name="Rectangle 173"/>
           <p:cNvSpPr/>
           <p:nvPr/>
         </p:nvSpPr>
         <p:spPr>
           <a:xfrm>
-            <a:off x="1353312" y="2724912"/>
+            <a:off x="6739128" y="2660904"/>
             <a:ext cx="91440" cy="50292"/>
           </a:xfrm>
           <a:prstGeom prst="rect">
@@ -9467,14 +10964,14 @@
       </p:sp>
       <p:sp>
         <p:nvSpPr>
-          <p:cNvPr id="146" name="Rectangle 145"/>
+          <p:cNvPr id="175" name="Rectangle 174"/>
           <p:cNvSpPr/>
           <p:nvPr/>
         </p:nvSpPr>
         <p:spPr>
           <a:xfrm>
-            <a:off x="1399032" y="3200400"/>
-            <a:ext cx="1371600" cy="457200"/>
+            <a:off x="6784848" y="2953512"/>
+            <a:ext cx="1188720" cy="274320"/>
           </a:xfrm>
           <a:prstGeom prst="rect">
             <a:avLst/>
@@ -9509,41 +11006,28 @@
           <a:p>
             <a:pPr algn="ctr"/>
             <a:r>
-              <a:rPr sz="700" b="1" i="0">
+              <a:rPr sz="650" b="0" i="0">
                 <a:solidFill>
                   <a:srgbClr val="000000"/>
                 </a:solidFill>
                 <a:latin typeface="맑은 고딕"/>
                 <a:ea typeface="맑은 고딕"/>
               </a:rPr>
-              <a:t>로컬 KV 계층</a:t>
-            </a:r>
-          </a:p>
-          <a:p>
-            <a:pPr algn="ctr"/>
-            <a:r>
-              <a:rPr sz="700" b="0" i="0">
-                <a:solidFill>
-                  <a:srgbClr val="000000"/>
-                </a:solidFill>
-                <a:latin typeface="맑은 고딕"/>
-                <a:ea typeface="맑은 고딕"/>
-              </a:rPr>
-              <a:t>HBM·DRAM·CXL·SSD</a:t>
-            </a:r>
-          </a:p>
-        </p:txBody>
-      </p:sp>
-      <p:sp>
-        <p:nvSpPr>
-          <p:cNvPr id="147" name="Rectangle 146"/>
+              <a:t>GPU DMA · CPU flush</a:t>
+            </a:r>
+          </a:p>
+        </p:txBody>
+      </p:sp>
+      <p:sp>
+        <p:nvSpPr>
+          <p:cNvPr id="176" name="Rectangle 175"/>
           <p:cNvSpPr/>
           <p:nvPr/>
         </p:nvSpPr>
         <p:spPr>
           <a:xfrm>
-            <a:off x="4690872" y="2286000"/>
-            <a:ext cx="1737360" cy="1691640"/>
+            <a:off x="10332720" y="2240280"/>
+            <a:ext cx="1417320" cy="1097280"/>
           </a:xfrm>
           <a:prstGeom prst="rect">
             <a:avLst/>
@@ -9592,14 +11076,14 @@
       </p:sp>
       <p:sp>
         <p:nvSpPr>
-          <p:cNvPr id="148" name="Rectangle 147"/>
+          <p:cNvPr id="177" name="Rectangle 176"/>
           <p:cNvSpPr/>
           <p:nvPr/>
         </p:nvSpPr>
         <p:spPr>
           <a:xfrm>
-            <a:off x="4690872" y="2286000"/>
-            <a:ext cx="1283817" cy="173736"/>
+            <a:off x="10332720" y="2240280"/>
+            <a:ext cx="822960" cy="173736"/>
           </a:xfrm>
           <a:prstGeom prst="rect">
             <a:avLst/>
@@ -9641,21 +11125,21 @@
                 <a:latin typeface="맑은 고딕"/>
                 <a:ea typeface="맑은 고딕"/>
               </a:rPr>
-              <a:t>«node» D 노드 (Decode)</a:t>
-            </a:r>
-          </a:p>
-        </p:txBody>
-      </p:sp>
-      <p:sp>
-        <p:nvSpPr>
-          <p:cNvPr id="149" name="Rectangle 148"/>
+              <a:t>«node» D 노드</a:t>
+            </a:r>
+          </a:p>
+        </p:txBody>
+      </p:sp>
+      <p:sp>
+        <p:nvSpPr>
+          <p:cNvPr id="178" name="Rectangle 177"/>
           <p:cNvSpPr/>
           <p:nvPr/>
         </p:nvSpPr>
         <p:spPr>
           <a:xfrm>
-            <a:off x="4873752" y="2578608"/>
-            <a:ext cx="1417320" cy="457200"/>
+            <a:off x="10442448" y="2514600"/>
+            <a:ext cx="1188720" cy="365760"/>
           </a:xfrm>
           <a:prstGeom prst="rect">
             <a:avLst/>
@@ -9697,33 +11181,20 @@
                 <a:latin typeface="맑은 고딕"/>
                 <a:ea typeface="맑은 고딕"/>
               </a:rPr>
-              <a:t>vLLM 인스턴스</a:t>
-            </a:r>
-          </a:p>
-          <a:p>
-            <a:pPr algn="ctr"/>
-            <a:r>
-              <a:rPr sz="700" b="0" i="0">
-                <a:solidFill>
-                  <a:srgbClr val="000000"/>
-                </a:solidFill>
-                <a:latin typeface="맑은 고딕"/>
-                <a:ea typeface="맑은 고딕"/>
-              </a:rPr>
-              <a:t>DP1·DP2·DP3 노드 내 결정</a:t>
-            </a:r>
-          </a:p>
-        </p:txBody>
-      </p:sp>
-      <p:sp>
-        <p:nvSpPr>
-          <p:cNvPr id="150" name="Rectangle 149"/>
+              <a:t>vLLM + KV 커넥터</a:t>
+            </a:r>
+          </a:p>
+        </p:txBody>
+      </p:sp>
+      <p:sp>
+        <p:nvSpPr>
+          <p:cNvPr id="179" name="Rectangle 178"/>
           <p:cNvSpPr/>
           <p:nvPr/>
         </p:nvSpPr>
         <p:spPr>
           <a:xfrm>
-            <a:off x="4828032" y="2633472"/>
+            <a:off x="10396728" y="2569464"/>
             <a:ext cx="91440" cy="50292"/>
           </a:xfrm>
           <a:prstGeom prst="rect">
@@ -9773,13 +11244,13 @@
       </p:sp>
       <p:sp>
         <p:nvSpPr>
-          <p:cNvPr id="151" name="Rectangle 150"/>
+          <p:cNvPr id="180" name="Rectangle 179"/>
           <p:cNvSpPr/>
           <p:nvPr/>
         </p:nvSpPr>
         <p:spPr>
           <a:xfrm>
-            <a:off x="4828032" y="2724912"/>
+            <a:off x="10396728" y="2660904"/>
             <a:ext cx="91440" cy="50292"/>
           </a:xfrm>
           <a:prstGeom prst="rect">
@@ -9829,14 +11300,14 @@
       </p:sp>
       <p:sp>
         <p:nvSpPr>
-          <p:cNvPr id="152" name="Rectangle 151"/>
+          <p:cNvPr id="181" name="Rectangle 180"/>
           <p:cNvSpPr/>
           <p:nvPr/>
         </p:nvSpPr>
         <p:spPr>
           <a:xfrm>
-            <a:off x="4873752" y="3200400"/>
-            <a:ext cx="1371600" cy="457200"/>
+            <a:off x="10442448" y="2953512"/>
+            <a:ext cx="1188720" cy="274320"/>
           </a:xfrm>
           <a:prstGeom prst="rect">
             <a:avLst/>
@@ -9871,41 +11342,140 @@
           <a:p>
             <a:pPr algn="ctr"/>
             <a:r>
-              <a:rPr sz="700" b="1" i="0">
+              <a:rPr sz="650" b="0" i="0">
                 <a:solidFill>
                   <a:srgbClr val="000000"/>
                 </a:solidFill>
                 <a:latin typeface="맑은 고딕"/>
                 <a:ea typeface="맑은 고딕"/>
               </a:rPr>
-              <a:t>로컬 KV 계층</a:t>
-            </a:r>
-          </a:p>
+              <a:t>GPU DMA · CPU flush</a:t>
+            </a:r>
+          </a:p>
+        </p:txBody>
+      </p:sp>
+      <p:sp>
+        <p:nvSpPr>
+          <p:cNvPr id="182" name="Rectangle 181"/>
+          <p:cNvSpPr/>
+          <p:nvPr/>
+        </p:nvSpPr>
+        <p:spPr>
+          <a:xfrm>
+            <a:off x="8366760" y="2148840"/>
+            <a:ext cx="1874519" cy="1965960"/>
+          </a:xfrm>
+          <a:prstGeom prst="rect">
+            <a:avLst/>
+          </a:prstGeom>
+          <a:solidFill>
+            <a:srgbClr val="FFF8F3"/>
+          </a:solidFill>
+          <a:ln w="15875">
+            <a:solidFill>
+              <a:srgbClr val="C55A11"/>
+            </a:solidFill>
+          </a:ln>
+          <a:effectLst/>
+        </p:spPr>
+        <p:style>
+          <a:lnRef idx="1">
+            <a:schemeClr val="accent1"/>
+          </a:lnRef>
+          <a:fillRef idx="3">
+            <a:schemeClr val="accent1"/>
+          </a:fillRef>
+          <a:effectRef idx="2">
+            <a:schemeClr val="accent1"/>
+          </a:effectRef>
+          <a:fontRef idx="minor">
+            <a:schemeClr val="lt1"/>
+          </a:fontRef>
+        </p:style>
+        <p:txBody>
+          <a:bodyPr rtlCol="0" anchor="ctr" wrap="square" lIns="36576" tIns="18288" rIns="36576" bIns="18288"/>
+          <a:lstStyle/>
           <a:p>
             <a:pPr algn="ctr"/>
             <a:r>
-              <a:rPr sz="700" b="0" i="0">
+              <a:rPr sz="800" b="0" i="0">
                 <a:solidFill>
                   <a:srgbClr val="000000"/>
                 </a:solidFill>
                 <a:latin typeface="맑은 고딕"/>
                 <a:ea typeface="맑은 고딕"/>
               </a:rPr>
-              <a:t>HBM·DRAM·CXL·SSD</a:t>
-            </a:r>
-          </a:p>
-        </p:txBody>
-      </p:sp>
-      <p:sp>
-        <p:nvSpPr>
-          <p:cNvPr id="153" name="Rectangle 152"/>
+              <a:t/>
+            </a:r>
+          </a:p>
+        </p:txBody>
+      </p:sp>
+      <p:sp>
+        <p:nvSpPr>
+          <p:cNvPr id="183" name="Rectangle 182"/>
           <p:cNvSpPr/>
           <p:nvPr/>
         </p:nvSpPr>
         <p:spPr>
           <a:xfrm>
-            <a:off x="3273552" y="2331720"/>
-            <a:ext cx="1097280" cy="594360"/>
+            <a:off x="8366760" y="2148840"/>
+            <a:ext cx="1415491" cy="173736"/>
+          </a:xfrm>
+          <a:prstGeom prst="rect">
+            <a:avLst/>
+          </a:prstGeom>
+          <a:solidFill>
+            <a:srgbClr val="C55A11"/>
+          </a:solidFill>
+          <a:ln w="12700">
+            <a:solidFill>
+              <a:srgbClr val="C55A11"/>
+            </a:solidFill>
+          </a:ln>
+          <a:effectLst/>
+        </p:spPr>
+        <p:style>
+          <a:lnRef idx="1">
+            <a:schemeClr val="accent1"/>
+          </a:lnRef>
+          <a:fillRef idx="3">
+            <a:schemeClr val="accent1"/>
+          </a:fillRef>
+          <a:effectRef idx="2">
+            <a:schemeClr val="accent1"/>
+          </a:effectRef>
+          <a:fontRef idx="minor">
+            <a:schemeClr val="lt1"/>
+          </a:fontRef>
+        </p:style>
+        <p:txBody>
+          <a:bodyPr rtlCol="0" anchor="ctr" wrap="square" lIns="45720" tIns="0" rIns="18288" bIns="0"/>
+          <a:lstStyle/>
+          <a:p>
+            <a:pPr algn="l"/>
+            <a:r>
+              <a:rPr sz="700" b="1" i="0">
+                <a:solidFill>
+                  <a:srgbClr val="FFFFFF"/>
+                </a:solidFill>
+                <a:latin typeface="맑은 고딕"/>
+                <a:ea typeface="맑은 고딕"/>
+              </a:rPr>
+              <a:t>«store» 비일관 CXL 공유 풀</a:t>
+            </a:r>
+          </a:p>
+        </p:txBody>
+      </p:sp>
+      <p:sp>
+        <p:nvSpPr>
+          <p:cNvPr id="184" name="Rectangle 183"/>
+          <p:cNvSpPr/>
+          <p:nvPr/>
+        </p:nvSpPr>
+        <p:spPr>
+          <a:xfrm>
+            <a:off x="8458200" y="2468880"/>
+            <a:ext cx="1691640" cy="292608"/>
           </a:xfrm>
           <a:prstGeom prst="rect">
             <a:avLst/>
@@ -9935,6 +11505,174 @@
           </a:fontRef>
         </p:style>
         <p:txBody>
+          <a:bodyPr rtlCol="0" anchor="ctr" wrap="square" lIns="36576" tIns="18288" rIns="36576" bIns="18288"/>
+          <a:lstStyle/>
+          <a:p>
+            <a:pPr algn="ctr"/>
+            <a:r>
+              <a:rPr sz="700" b="0" i="0">
+                <a:solidFill>
+                  <a:srgbClr val="000000"/>
+                </a:solidFill>
+                <a:latin typeface="맑은 고딕"/>
+                <a:ea typeface="맑은 고딕"/>
+              </a:rPr>
+              <a:t>KV 블록 (불변·해시 식별)</a:t>
+            </a:r>
+          </a:p>
+        </p:txBody>
+      </p:sp>
+      <p:sp>
+        <p:nvSpPr>
+          <p:cNvPr id="185" name="Rectangle 184"/>
+          <p:cNvSpPr/>
+          <p:nvPr/>
+        </p:nvSpPr>
+        <p:spPr>
+          <a:xfrm>
+            <a:off x="8458200" y="2852928"/>
+            <a:ext cx="1691640" cy="310896"/>
+          </a:xfrm>
+          <a:prstGeom prst="rect">
+            <a:avLst/>
+          </a:prstGeom>
+          <a:solidFill>
+            <a:srgbClr val="FBE5D6"/>
+          </a:solidFill>
+          <a:ln w="12700">
+            <a:solidFill>
+              <a:srgbClr val="C55A11"/>
+            </a:solidFill>
+          </a:ln>
+          <a:effectLst/>
+        </p:spPr>
+        <p:style>
+          <a:lnRef idx="1">
+            <a:schemeClr val="accent1"/>
+          </a:lnRef>
+          <a:fillRef idx="3">
+            <a:schemeClr val="accent1"/>
+          </a:fillRef>
+          <a:effectRef idx="2">
+            <a:schemeClr val="accent1"/>
+          </a:effectRef>
+          <a:fontRef idx="minor">
+            <a:schemeClr val="lt1"/>
+          </a:fontRef>
+        </p:style>
+        <p:txBody>
+          <a:bodyPr rtlCol="0" anchor="ctr" wrap="square" lIns="36576" tIns="18288" rIns="36576" bIns="18288"/>
+          <a:lstStyle/>
+          <a:p>
+            <a:pPr algn="ctr"/>
+            <a:r>
+              <a:rPr sz="700" b="0" i="0">
+                <a:solidFill>
+                  <a:srgbClr val="000000"/>
+                </a:solidFill>
+                <a:latin typeface="맑은 고딕"/>
+                <a:ea typeface="맑은 고딕"/>
+              </a:rPr>
+              <a:t>메타데이터 (인덱스·refcount)</a:t>
+            </a:r>
+          </a:p>
+        </p:txBody>
+      </p:sp>
+      <p:sp>
+        <p:nvSpPr>
+          <p:cNvPr id="186" name="Rectangle 185"/>
+          <p:cNvSpPr/>
+          <p:nvPr/>
+        </p:nvSpPr>
+        <p:spPr>
+          <a:xfrm>
+            <a:off x="8458200" y="3236976"/>
+            <a:ext cx="1691640" cy="274320"/>
+          </a:xfrm>
+          <a:prstGeom prst="rect">
+            <a:avLst/>
+          </a:prstGeom>
+          <a:solidFill>
+            <a:srgbClr val="FBE5D6"/>
+          </a:solidFill>
+          <a:ln w="12700">
+            <a:solidFill>
+              <a:srgbClr val="C55A11"/>
+            </a:solidFill>
+          </a:ln>
+          <a:effectLst/>
+        </p:spPr>
+        <p:style>
+          <a:lnRef idx="1">
+            <a:schemeClr val="accent1"/>
+          </a:lnRef>
+          <a:fillRef idx="3">
+            <a:schemeClr val="accent1"/>
+          </a:fillRef>
+          <a:effectRef idx="2">
+            <a:schemeClr val="accent1"/>
+          </a:effectRef>
+          <a:fontRef idx="minor">
+            <a:schemeClr val="lt1"/>
+          </a:fontRef>
+        </p:style>
+        <p:txBody>
+          <a:bodyPr rtlCol="0" anchor="ctr" wrap="square" lIns="36576" tIns="18288" rIns="36576" bIns="18288"/>
+          <a:lstStyle/>
+          <a:p>
+            <a:pPr algn="ctr"/>
+            <a:r>
+              <a:rPr sz="700" b="0" i="0">
+                <a:solidFill>
+                  <a:srgbClr val="000000"/>
+                </a:solidFill>
+                <a:latin typeface="맑은 고딕"/>
+                <a:ea typeface="맑은 고딕"/>
+              </a:rPr>
+              <a:t>전역 락 배열 (노드별 슬롯)</a:t>
+            </a:r>
+          </a:p>
+        </p:txBody>
+      </p:sp>
+      <p:sp>
+        <p:nvSpPr>
+          <p:cNvPr id="187" name="Rectangle 186"/>
+          <p:cNvSpPr/>
+          <p:nvPr/>
+        </p:nvSpPr>
+        <p:spPr>
+          <a:xfrm>
+            <a:off x="8458200" y="3584448"/>
+            <a:ext cx="1691640" cy="420624"/>
+          </a:xfrm>
+          <a:prstGeom prst="rect">
+            <a:avLst/>
+          </a:prstGeom>
+          <a:solidFill>
+            <a:srgbClr val="FDECEA"/>
+          </a:solidFill>
+          <a:ln w="12700">
+            <a:solidFill>
+              <a:srgbClr val="C00000"/>
+            </a:solidFill>
+          </a:ln>
+          <a:effectLst/>
+        </p:spPr>
+        <p:style>
+          <a:lnRef idx="1">
+            <a:schemeClr val="accent1"/>
+          </a:lnRef>
+          <a:fillRef idx="3">
+            <a:schemeClr val="accent1"/>
+          </a:fillRef>
+          <a:effectRef idx="2">
+            <a:schemeClr val="accent1"/>
+          </a:effectRef>
+          <a:fontRef idx="minor">
+            <a:schemeClr val="lt1"/>
+          </a:fontRef>
+        </p:style>
+        <p:txBody>
           <a:bodyPr rtlCol="0" anchor="ctr" wrap="square" lIns="64008" tIns="18288" rIns="27432" bIns="18288"/>
           <a:lstStyle/>
           <a:p>
@@ -9947,7 +11685,7 @@
                 <a:latin typeface="맑은 고딕"/>
                 <a:ea typeface="맑은 고딕"/>
               </a:rPr>
-              <a:t>KV 위치 인덱스</a:t>
+              <a:t>락 매니저 스레드</a:t>
             </a:r>
           </a:p>
           <a:p>
@@ -9960,44 +11698,31 @@
                 <a:latin typeface="맑은 고딕"/>
                 <a:ea typeface="맑은 고딕"/>
               </a:rPr>
-              <a:t>(중앙)</a:t>
-            </a:r>
-          </a:p>
-          <a:p>
-            <a:pPr algn="ctr"/>
-            <a:r>
-              <a:rPr sz="700" b="0" i="0">
-                <a:solidFill>
-                  <a:srgbClr val="000000"/>
-                </a:solidFill>
-                <a:latin typeface="맑은 고딕"/>
-                <a:ea typeface="맑은 고딕"/>
-              </a:rPr>
-              <a:t>위치·부하 이벤트 수집</a:t>
-            </a:r>
-          </a:p>
-        </p:txBody>
-      </p:sp>
-      <p:sp>
-        <p:nvSpPr>
-          <p:cNvPr id="154" name="Rectangle 153"/>
+              <a:t>슬롯 스캔, 1노드에 grant</a:t>
+            </a:r>
+          </a:p>
+        </p:txBody>
+      </p:sp>
+      <p:sp>
+        <p:nvSpPr>
+          <p:cNvPr id="188" name="Rectangle 187"/>
           <p:cNvSpPr/>
           <p:nvPr/>
         </p:nvSpPr>
         <p:spPr>
           <a:xfrm>
-            <a:off x="3227832" y="2386584"/>
+            <a:off x="8412480" y="3639312"/>
             <a:ext cx="91440" cy="50292"/>
           </a:xfrm>
           <a:prstGeom prst="rect">
             <a:avLst/>
           </a:prstGeom>
           <a:solidFill>
-            <a:srgbClr val="FBE5D6"/>
+            <a:srgbClr val="FDECEA"/>
           </a:solidFill>
           <a:ln w="9525">
             <a:solidFill>
-              <a:srgbClr val="C55A11"/>
+              <a:srgbClr val="C00000"/>
             </a:solidFill>
           </a:ln>
           <a:effectLst/>
@@ -10036,24 +11761,24 @@
       </p:sp>
       <p:sp>
         <p:nvSpPr>
-          <p:cNvPr id="155" name="Rectangle 154"/>
+          <p:cNvPr id="189" name="Rectangle 188"/>
           <p:cNvSpPr/>
           <p:nvPr/>
         </p:nvSpPr>
         <p:spPr>
           <a:xfrm>
-            <a:off x="3227832" y="2478024"/>
+            <a:off x="8412480" y="3730752"/>
             <a:ext cx="91440" cy="50292"/>
           </a:xfrm>
           <a:prstGeom prst="rect">
             <a:avLst/>
           </a:prstGeom>
           <a:solidFill>
-            <a:srgbClr val="FBE5D6"/>
+            <a:srgbClr val="FDECEA"/>
           </a:solidFill>
           <a:ln w="9525">
             <a:solidFill>
-              <a:srgbClr val="C55A11"/>
+              <a:srgbClr val="C00000"/>
             </a:solidFill>
           </a:ln>
           <a:effectLst/>
@@ -10092,21 +11817,21 @@
       </p:sp>
       <p:cxnSp>
         <p:nvCxnSpPr>
-          <p:cNvPr id="156" name="Connector 155"/>
+          <p:cNvPr id="190" name="Connector 189"/>
           <p:cNvCxnSpPr/>
           <p:nvPr/>
         </p:nvCxnSpPr>
         <p:spPr>
           <a:xfrm>
-            <a:off x="3822191" y="2130552"/>
-            <a:ext cx="0" cy="201168"/>
+            <a:off x="8092440" y="2926080"/>
+            <a:ext cx="365760" cy="0"/>
           </a:xfrm>
           <a:prstGeom prst="line">
             <a:avLst/>
           </a:prstGeom>
           <a:ln w="15875">
             <a:solidFill>
-              <a:srgbClr val="404040"/>
+              <a:srgbClr val="2F5597"/>
             </a:solidFill>
             <a:tailEnd type="triangle"/>
           </a:ln>
@@ -10128,105 +11853,13 @@
       </p:cxnSp>
       <p:sp>
         <p:nvSpPr>
-          <p:cNvPr id="157" name="Oval 156"/>
+          <p:cNvPr id="191" name="Oval 190"/>
           <p:cNvSpPr/>
           <p:nvPr/>
         </p:nvSpPr>
         <p:spPr>
           <a:xfrm>
-            <a:off x="3744468" y="2153412"/>
-            <a:ext cx="155448" cy="155448"/>
-          </a:xfrm>
-          <a:prstGeom prst="ellipse">
-            <a:avLst/>
-          </a:prstGeom>
-          <a:solidFill>
-            <a:srgbClr val="404040"/>
-          </a:solidFill>
-          <a:ln w="9525">
-            <a:solidFill>
-              <a:srgbClr val="FFFFFF"/>
-            </a:solidFill>
-          </a:ln>
-          <a:effectLst/>
-        </p:spPr>
-        <p:style>
-          <a:lnRef idx="1">
-            <a:schemeClr val="accent1"/>
-          </a:lnRef>
-          <a:fillRef idx="3">
-            <a:schemeClr val="accent1"/>
-          </a:fillRef>
-          <a:effectRef idx="2">
-            <a:schemeClr val="accent1"/>
-          </a:effectRef>
-          <a:fontRef idx="minor">
-            <a:schemeClr val="lt1"/>
-          </a:fontRef>
-        </p:style>
-        <p:txBody>
-          <a:bodyPr rtlCol="0" anchor="ctr" wrap="square" lIns="0" tIns="0" rIns="0" bIns="0"/>
-          <a:lstStyle/>
-          <a:p>
-            <a:pPr algn="ctr"/>
-            <a:r>
-              <a:rPr sz="650" b="1" i="0">
-                <a:solidFill>
-                  <a:srgbClr val="FFFFFF"/>
-                </a:solidFill>
-                <a:latin typeface="맑은 고딕"/>
-                <a:ea typeface="맑은 고딕"/>
-              </a:rPr>
-              <a:t>3</a:t>
-            </a:r>
-          </a:p>
-        </p:txBody>
-      </p:sp>
-      <p:cxnSp>
-        <p:nvCxnSpPr>
-          <p:cNvPr id="158" name="Connector 157"/>
-          <p:cNvCxnSpPr/>
-          <p:nvPr/>
-        </p:nvCxnSpPr>
-        <p:spPr>
-          <a:xfrm>
-            <a:off x="2953512" y="3383280"/>
-            <a:ext cx="1737360" cy="0"/>
-          </a:xfrm>
-          <a:prstGeom prst="line">
-            <a:avLst/>
-          </a:prstGeom>
-          <a:ln w="15875">
-            <a:solidFill>
-              <a:srgbClr val="2F5597"/>
-            </a:solidFill>
-            <a:tailEnd type="triangle"/>
-          </a:ln>
-        </p:spPr>
-        <p:style>
-          <a:lnRef idx="2">
-            <a:schemeClr val="accent1"/>
-          </a:lnRef>
-          <a:fillRef idx="0">
-            <a:schemeClr val="accent1"/>
-          </a:fillRef>
-          <a:effectRef idx="1">
-            <a:schemeClr val="accent1"/>
-          </a:effectRef>
-          <a:fontRef idx="minor">
-            <a:schemeClr val="tx1"/>
-          </a:fontRef>
-        </p:style>
-      </p:cxnSp>
-      <p:sp>
-        <p:nvSpPr>
-          <p:cNvPr id="159" name="Oval 158"/>
-          <p:cNvSpPr/>
-          <p:nvPr/>
-        </p:nvSpPr>
-        <p:spPr>
-          <a:xfrm>
-            <a:off x="3744468" y="3305556"/>
+            <a:off x="8197596" y="2848356"/>
             <a:ext cx="155448" cy="155448"/>
           </a:xfrm>
           <a:prstGeom prst="ellipse">
@@ -10274,59 +11907,23 @@
           </a:p>
         </p:txBody>
       </p:sp>
-      <p:sp>
-        <p:nvSpPr>
-          <p:cNvPr id="160" name="TextBox 159"/>
-          <p:cNvSpPr txBox="1"/>
-          <p:nvPr/>
-        </p:nvSpPr>
-        <p:spPr>
-          <a:xfrm>
-            <a:off x="2999232" y="3163824"/>
-            <a:ext cx="1645920" cy="146304"/>
-          </a:xfrm>
-          <a:prstGeom prst="rect">
-            <a:avLst/>
-          </a:prstGeom>
-          <a:noFill/>
-        </p:spPr>
-        <p:txBody>
-          <a:bodyPr wrap="square" lIns="0" tIns="0" rIns="0" bIns="0" anchor="t">
-            <a:spAutoFit/>
-          </a:bodyPr>
-          <a:lstStyle/>
-          <a:p>
-            <a:pPr algn="ctr"/>
-            <a:r>
-              <a:rPr sz="650" b="1" i="0">
-                <a:solidFill>
-                  <a:srgbClr val="2F5597"/>
-                </a:solidFill>
-                <a:latin typeface="맑은 고딕"/>
-                <a:ea typeface="맑은 고딕"/>
-              </a:rPr>
-              <a:t>KV 전송 (P→D)</a:t>
-            </a:r>
-          </a:p>
-        </p:txBody>
-      </p:sp>
       <p:cxnSp>
         <p:nvCxnSpPr>
-          <p:cNvPr id="161" name="Connector 160"/>
+          <p:cNvPr id="192" name="Connector 191"/>
           <p:cNvCxnSpPr/>
           <p:nvPr/>
         </p:nvCxnSpPr>
         <p:spPr>
           <a:xfrm flipH="1">
-            <a:off x="2953512" y="3703320"/>
-            <a:ext cx="1737360" cy="0"/>
+            <a:off x="10149840" y="2926080"/>
+            <a:ext cx="182880" cy="0"/>
           </a:xfrm>
           <a:prstGeom prst="line">
             <a:avLst/>
           </a:prstGeom>
           <a:ln w="15875">
             <a:solidFill>
-              <a:srgbClr val="C00000"/>
+              <a:srgbClr val="2F5597"/>
             </a:solidFill>
             <a:tailEnd type="triangle"/>
           </a:ln>
@@ -10348,20 +11945,112 @@
       </p:cxnSp>
       <p:sp>
         <p:nvSpPr>
-          <p:cNvPr id="162" name="Oval 161"/>
+          <p:cNvPr id="193" name="Oval 192"/>
           <p:cNvSpPr/>
           <p:nvPr/>
         </p:nvSpPr>
         <p:spPr>
           <a:xfrm>
-            <a:off x="3744468" y="3625596"/>
+            <a:off x="10163555" y="2848356"/>
             <a:ext cx="155448" cy="155448"/>
           </a:xfrm>
           <a:prstGeom prst="ellipse">
             <a:avLst/>
           </a:prstGeom>
           <a:solidFill>
-            <a:srgbClr val="C00000"/>
+            <a:srgbClr val="2F5597"/>
+          </a:solidFill>
+          <a:ln w="9525">
+            <a:solidFill>
+              <a:srgbClr val="FFFFFF"/>
+            </a:solidFill>
+          </a:ln>
+          <a:effectLst/>
+        </p:spPr>
+        <p:style>
+          <a:lnRef idx="1">
+            <a:schemeClr val="accent1"/>
+          </a:lnRef>
+          <a:fillRef idx="3">
+            <a:schemeClr val="accent1"/>
+          </a:fillRef>
+          <a:effectRef idx="2">
+            <a:schemeClr val="accent1"/>
+          </a:effectRef>
+          <a:fontRef idx="minor">
+            <a:schemeClr val="lt1"/>
+          </a:fontRef>
+        </p:style>
+        <p:txBody>
+          <a:bodyPr rtlCol="0" anchor="ctr" wrap="square" lIns="0" tIns="0" rIns="0" bIns="0"/>
+          <a:lstStyle/>
+          <a:p>
+            <a:pPr algn="ctr"/>
+            <a:r>
+              <a:rPr sz="650" b="1" i="0">
+                <a:solidFill>
+                  <a:srgbClr val="FFFFFF"/>
+                </a:solidFill>
+                <a:latin typeface="맑은 고딕"/>
+                <a:ea typeface="맑은 고딕"/>
+              </a:rPr>
+              <a:t>1</a:t>
+            </a:r>
+          </a:p>
+        </p:txBody>
+      </p:sp>
+      <p:cxnSp>
+        <p:nvCxnSpPr>
+          <p:cNvPr id="194" name="Connector 193"/>
+          <p:cNvCxnSpPr/>
+          <p:nvPr/>
+        </p:nvCxnSpPr>
+        <p:spPr>
+          <a:xfrm>
+            <a:off x="8092440" y="3374136"/>
+            <a:ext cx="365760" cy="0"/>
+          </a:xfrm>
+          <a:prstGeom prst="line">
+            <a:avLst/>
+          </a:prstGeom>
+          <a:ln w="15875">
+            <a:solidFill>
+              <a:srgbClr val="2F5597"/>
+            </a:solidFill>
+            <a:tailEnd type="triangle"/>
+          </a:ln>
+        </p:spPr>
+        <p:style>
+          <a:lnRef idx="2">
+            <a:schemeClr val="accent1"/>
+          </a:lnRef>
+          <a:fillRef idx="0">
+            <a:schemeClr val="accent1"/>
+          </a:fillRef>
+          <a:effectRef idx="1">
+            <a:schemeClr val="accent1"/>
+          </a:effectRef>
+          <a:fontRef idx="minor">
+            <a:schemeClr val="tx1"/>
+          </a:fontRef>
+        </p:style>
+      </p:cxnSp>
+      <p:sp>
+        <p:nvSpPr>
+          <p:cNvPr id="195" name="Oval 194"/>
+          <p:cNvSpPr/>
+          <p:nvPr/>
+        </p:nvSpPr>
+        <p:spPr>
+          <a:xfrm>
+            <a:off x="8197596" y="3296412"/>
+            <a:ext cx="155448" cy="155448"/>
+          </a:xfrm>
+          <a:prstGeom prst="ellipse">
+            <a:avLst/>
+          </a:prstGeom>
+          <a:solidFill>
+            <a:srgbClr val="2F5597"/>
           </a:solidFill>
           <a:ln w="9525">
             <a:solidFill>
@@ -10402,51 +12091,107 @@
           </a:p>
         </p:txBody>
       </p:sp>
-      <p:sp>
-        <p:nvSpPr>
-          <p:cNvPr id="163" name="TextBox 162"/>
-          <p:cNvSpPr txBox="1"/>
+      <p:cxnSp>
+        <p:nvCxnSpPr>
+          <p:cNvPr id="196" name="Connector 195"/>
+          <p:cNvCxnSpPr/>
           <p:nvPr/>
-        </p:nvSpPr>
-        <p:spPr>
-          <a:xfrm>
-            <a:off x="2999232" y="3831336"/>
-            <a:ext cx="1645920" cy="146304"/>
-          </a:xfrm>
-          <a:prstGeom prst="rect">
-            <a:avLst/>
-          </a:prstGeom>
-          <a:noFill/>
-        </p:spPr>
-        <p:txBody>
-          <a:bodyPr wrap="square" lIns="0" tIns="0" rIns="0" bIns="0" anchor="t">
-            <a:spAutoFit/>
-          </a:bodyPr>
+        </p:nvCxnSpPr>
+        <p:spPr>
+          <a:xfrm flipH="1">
+            <a:off x="10149840" y="3374136"/>
+            <a:ext cx="182880" cy="0"/>
+          </a:xfrm>
+          <a:prstGeom prst="line">
+            <a:avLst/>
+          </a:prstGeom>
+          <a:ln w="15875">
+            <a:solidFill>
+              <a:srgbClr val="2F5597"/>
+            </a:solidFill>
+            <a:tailEnd type="triangle"/>
+          </a:ln>
+        </p:spPr>
+        <p:style>
+          <a:lnRef idx="2">
+            <a:schemeClr val="accent1"/>
+          </a:lnRef>
+          <a:fillRef idx="0">
+            <a:schemeClr val="accent1"/>
+          </a:fillRef>
+          <a:effectRef idx="1">
+            <a:schemeClr val="accent1"/>
+          </a:effectRef>
+          <a:fontRef idx="minor">
+            <a:schemeClr val="tx1"/>
+          </a:fontRef>
+        </p:style>
+      </p:cxnSp>
+      <p:sp>
+        <p:nvSpPr>
+          <p:cNvPr id="197" name="Oval 196"/>
+          <p:cNvSpPr/>
+          <p:nvPr/>
+        </p:nvSpPr>
+        <p:spPr>
+          <a:xfrm>
+            <a:off x="10163555" y="3296412"/>
+            <a:ext cx="155448" cy="155448"/>
+          </a:xfrm>
+          <a:prstGeom prst="ellipse">
+            <a:avLst/>
+          </a:prstGeom>
+          <a:solidFill>
+            <a:srgbClr val="2F5597"/>
+          </a:solidFill>
+          <a:ln w="9525">
+            <a:solidFill>
+              <a:srgbClr val="FFFFFF"/>
+            </a:solidFill>
+          </a:ln>
+          <a:effectLst/>
+        </p:spPr>
+        <p:style>
+          <a:lnRef idx="1">
+            <a:schemeClr val="accent1"/>
+          </a:lnRef>
+          <a:fillRef idx="3">
+            <a:schemeClr val="accent1"/>
+          </a:fillRef>
+          <a:effectRef idx="2">
+            <a:schemeClr val="accent1"/>
+          </a:effectRef>
+          <a:fontRef idx="minor">
+            <a:schemeClr val="lt1"/>
+          </a:fontRef>
+        </p:style>
+        <p:txBody>
+          <a:bodyPr rtlCol="0" anchor="ctr" wrap="square" lIns="0" tIns="0" rIns="0" bIns="0"/>
           <a:lstStyle/>
           <a:p>
             <a:pPr algn="ctr"/>
             <a:r>
               <a:rPr sz="650" b="1" i="0">
                 <a:solidFill>
-                  <a:srgbClr val="C00000"/>
+                  <a:srgbClr val="FFFFFF"/>
                 </a:solidFill>
                 <a:latin typeface="맑은 고딕"/>
                 <a:ea typeface="맑은 고딕"/>
               </a:rPr>
-              <a:t>History KV 전송 (D→P, 다음 Turn)</a:t>
-            </a:r>
-          </a:p>
-        </p:txBody>
-      </p:sp>
-      <p:sp>
-        <p:nvSpPr>
-          <p:cNvPr id="164" name="Rounded Rectangle 163"/>
+              <a:t>2</a:t>
+            </a:r>
+          </a:p>
+        </p:txBody>
+      </p:sp>
+      <p:sp>
+        <p:nvSpPr>
+          <p:cNvPr id="198" name="Rounded Rectangle 197"/>
           <p:cNvSpPr/>
           <p:nvPr/>
         </p:nvSpPr>
         <p:spPr>
           <a:xfrm>
-            <a:off x="1243584" y="4087368"/>
+            <a:off x="6656832" y="4224528"/>
             <a:ext cx="329184" cy="155448"/>
           </a:xfrm>
           <a:prstGeom prst="roundRect">
@@ -10489,21 +12234,21 @@
                 <a:latin typeface="맑은 고딕"/>
                 <a:ea typeface="맑은 고딕"/>
               </a:rPr>
-              <a:t>DP1</a:t>
-            </a:r>
-          </a:p>
-        </p:txBody>
-      </p:sp>
-      <p:sp>
-        <p:nvSpPr>
-          <p:cNvPr id="165" name="TextBox 164"/>
+              <a:t>DP2</a:t>
+            </a:r>
+          </a:p>
+        </p:txBody>
+      </p:sp>
+      <p:sp>
+        <p:nvSpPr>
+          <p:cNvPr id="199" name="TextBox 198"/>
           <p:cNvSpPr txBox="1"/>
           <p:nvPr/>
         </p:nvSpPr>
         <p:spPr>
           <a:xfrm>
-            <a:off x="1627632" y="4069080"/>
-            <a:ext cx="4754880" cy="182880"/>
+            <a:off x="7040880" y="4206240"/>
+            <a:ext cx="4846320" cy="182880"/>
           </a:xfrm>
           <a:prstGeom prst="rect">
             <a:avLst/>
@@ -10525,20 +12270,20 @@
                 <a:latin typeface="맑은 고딕"/>
                 <a:ea typeface="맑은 고딕"/>
               </a:rPr>
-              <a:t>노드 내 tier 배치(공유·전송 대상 KV 포함)는 DP1이 결정</a:t>
-            </a:r>
-          </a:p>
-        </p:txBody>
-      </p:sp>
-      <p:sp>
-        <p:nvSpPr>
-          <p:cNvPr id="166" name="Rounded Rectangle 165"/>
+              <a:t>KV 공유 풀이 있을 때 Tmove가 줄어드는 전제를 DP4가 안전하게 만듦</a:t>
+            </a:r>
+          </a:p>
+        </p:txBody>
+      </p:sp>
+      <p:sp>
+        <p:nvSpPr>
+          <p:cNvPr id="200" name="Rounded Rectangle 199"/>
           <p:cNvSpPr/>
           <p:nvPr/>
         </p:nvSpPr>
         <p:spPr>
           <a:xfrm>
-            <a:off x="1243584" y="4325112"/>
+            <a:off x="6656832" y="4443984"/>
             <a:ext cx="329184" cy="155448"/>
           </a:xfrm>
           <a:prstGeom prst="roundRect">
@@ -10581,21 +12326,21 @@
                 <a:latin typeface="맑은 고딕"/>
                 <a:ea typeface="맑은 고딕"/>
               </a:rPr>
-              <a:t>DP2</a:t>
-            </a:r>
-          </a:p>
-        </p:txBody>
-      </p:sp>
-      <p:sp>
-        <p:nvSpPr>
-          <p:cNvPr id="167" name="TextBox 166"/>
+              <a:t>DP3</a:t>
+            </a:r>
+          </a:p>
+        </p:txBody>
+      </p:sp>
+      <p:sp>
+        <p:nvSpPr>
+          <p:cNvPr id="201" name="TextBox 200"/>
           <p:cNvSpPr txBox="1"/>
           <p:nvPr/>
         </p:nvSpPr>
         <p:spPr>
           <a:xfrm>
-            <a:off x="1627632" y="4306824"/>
-            <a:ext cx="4754880" cy="182880"/>
+            <a:off x="7040880" y="4425696"/>
+            <a:ext cx="4846320" cy="182880"/>
           </a:xfrm>
           <a:prstGeom prst="rect">
             <a:avLst/>
@@ -10617,20 +12362,20 @@
                 <a:latin typeface="맑은 고딕"/>
                 <a:ea typeface="맑은 고딕"/>
               </a:rPr>
-              <a:t>Planner가 KV 위치·Tmove를 중앙 인덱스에서 조회</a:t>
-            </a:r>
-          </a:p>
-        </p:txBody>
-      </p:sp>
-      <p:sp>
-        <p:nvSpPr>
-          <p:cNvPr id="168" name="Rounded Rectangle 167"/>
+              <a:t>Comp.KV도 같은 블록 의미(불변·해시)로 공유되어 같은 경로를 사용</a:t>
+            </a:r>
+          </a:p>
+        </p:txBody>
+      </p:sp>
+      <p:sp>
+        <p:nvSpPr>
+          <p:cNvPr id="202" name="Rounded Rectangle 201"/>
           <p:cNvSpPr/>
           <p:nvPr/>
         </p:nvSpPr>
         <p:spPr>
           <a:xfrm>
-            <a:off x="1243584" y="4562856"/>
+            <a:off x="6656832" y="4663440"/>
             <a:ext cx="329184" cy="155448"/>
           </a:xfrm>
           <a:prstGeom prst="roundRect">
@@ -10673,21 +12418,21 @@
                 <a:latin typeface="맑은 고딕"/>
                 <a:ea typeface="맑은 고딕"/>
               </a:rPr>
-              <a:t>DP3</a:t>
-            </a:r>
-          </a:p>
-        </p:txBody>
-      </p:sp>
-      <p:sp>
-        <p:nvSpPr>
-          <p:cNvPr id="169" name="TextBox 168"/>
+              <a:t>DP1</a:t>
+            </a:r>
+          </a:p>
+        </p:txBody>
+      </p:sp>
+      <p:sp>
+        <p:nvSpPr>
+          <p:cNvPr id="203" name="TextBox 202"/>
           <p:cNvSpPr txBox="1"/>
           <p:nvPr/>
         </p:nvSpPr>
         <p:spPr>
           <a:xfrm>
-            <a:off x="1627632" y="4544568"/>
-            <a:ext cx="4754880" cy="182880"/>
+            <a:off x="7040880" y="4645152"/>
+            <a:ext cx="4846320" cy="182880"/>
           </a:xfrm>
           <a:prstGeom prst="rect">
             <a:avLst/>
@@ -10709,1829 +12454,7 @@
                 <a:latin typeface="맑은 고딕"/>
                 <a:ea typeface="맑은 고딕"/>
               </a:rPr>
-              <a:t>압축된 Comp.KV를 전송 (전송량 감소)</a:t>
-            </a:r>
-          </a:p>
-        </p:txBody>
-      </p:sp>
-      <p:sp>
-        <p:nvSpPr>
-          <p:cNvPr id="170" name="Rectangle 169"/>
-          <p:cNvSpPr/>
-          <p:nvPr/>
-        </p:nvSpPr>
-        <p:spPr>
-          <a:xfrm>
-            <a:off x="7772400" y="1764792"/>
-            <a:ext cx="2926080" cy="365760"/>
-          </a:xfrm>
-          <a:prstGeom prst="rect">
-            <a:avLst/>
-          </a:prstGeom>
-          <a:solidFill>
-            <a:srgbClr val="FFFFFF"/>
-          </a:solidFill>
-          <a:ln w="12700">
-            <a:solidFill>
-              <a:srgbClr val="404040"/>
-            </a:solidFill>
-          </a:ln>
-          <a:effectLst/>
-        </p:spPr>
-        <p:style>
-          <a:lnRef idx="1">
-            <a:schemeClr val="accent1"/>
-          </a:lnRef>
-          <a:fillRef idx="3">
-            <a:schemeClr val="accent1"/>
-          </a:fillRef>
-          <a:effectRef idx="2">
-            <a:schemeClr val="accent1"/>
-          </a:effectRef>
-          <a:fontRef idx="minor">
-            <a:schemeClr val="lt1"/>
-          </a:fontRef>
-        </p:style>
-        <p:txBody>
-          <a:bodyPr rtlCol="0" anchor="ctr" wrap="square" lIns="36576" tIns="18288" rIns="36576" bIns="18288"/>
-          <a:lstStyle/>
-          <a:p>
-            <a:pPr algn="ctr"/>
-            <a:r>
-              <a:rPr sz="700" b="1" i="0">
-                <a:solidFill>
-                  <a:srgbClr val="000000"/>
-                </a:solidFill>
-                <a:latin typeface="맑은 고딕"/>
-                <a:ea typeface="맑은 고딕"/>
-              </a:rPr>
-              <a:t>Execution Planner</a:t>
-            </a:r>
-          </a:p>
-          <a:p>
-            <a:pPr algn="ctr"/>
-            <a:r>
-              <a:rPr sz="700" b="0" i="0">
-                <a:solidFill>
-                  <a:srgbClr val="000000"/>
-                </a:solidFill>
-                <a:latin typeface="맑은 고딕"/>
-                <a:ea typeface="맑은 고딕"/>
-              </a:rPr>
-              <a:t>Tmove · Tprefill · Tqueue 비용으로 P/D 노드 선택</a:t>
-            </a:r>
-          </a:p>
-        </p:txBody>
-      </p:sp>
-      <p:sp>
-        <p:nvSpPr>
-          <p:cNvPr id="171" name="Rounded Rectangle 170"/>
-          <p:cNvSpPr/>
-          <p:nvPr/>
-        </p:nvSpPr>
-        <p:spPr>
-          <a:xfrm>
-            <a:off x="10744200" y="1783080"/>
-            <a:ext cx="329184" cy="155448"/>
-          </a:xfrm>
-          <a:prstGeom prst="roundRect">
-            <a:avLst/>
-          </a:prstGeom>
-          <a:solidFill>
-            <a:srgbClr val="404040"/>
-          </a:solidFill>
-          <a:ln w="12700">
-            <a:solidFill>
-              <a:srgbClr val="404040"/>
-            </a:solidFill>
-          </a:ln>
-          <a:effectLst/>
-        </p:spPr>
-        <p:style>
-          <a:lnRef idx="1">
-            <a:schemeClr val="accent1"/>
-          </a:lnRef>
-          <a:fillRef idx="3">
-            <a:schemeClr val="accent1"/>
-          </a:fillRef>
-          <a:effectRef idx="2">
-            <a:schemeClr val="accent1"/>
-          </a:effectRef>
-          <a:fontRef idx="minor">
-            <a:schemeClr val="lt1"/>
-          </a:fontRef>
-        </p:style>
-        <p:txBody>
-          <a:bodyPr rtlCol="0" anchor="ctr" wrap="square" lIns="0" tIns="0" rIns="0" bIns="0"/>
-          <a:lstStyle/>
-          <a:p>
-            <a:pPr algn="ctr"/>
-            <a:r>
-              <a:rPr sz="650" b="1" i="0">
-                <a:solidFill>
-                  <a:srgbClr val="FFFFFF"/>
-                </a:solidFill>
-                <a:latin typeface="맑은 고딕"/>
-                <a:ea typeface="맑은 고딕"/>
-              </a:rPr>
-              <a:t>DP2</a:t>
-            </a:r>
-          </a:p>
-        </p:txBody>
-      </p:sp>
-      <p:sp>
-        <p:nvSpPr>
-          <p:cNvPr id="172" name="Rectangle 171"/>
-          <p:cNvSpPr/>
-          <p:nvPr/>
-        </p:nvSpPr>
-        <p:spPr>
-          <a:xfrm>
-            <a:off x="6629400" y="2286000"/>
-            <a:ext cx="1737360" cy="1691640"/>
-          </a:xfrm>
-          <a:prstGeom prst="rect">
-            <a:avLst/>
-          </a:prstGeom>
-          <a:solidFill>
-            <a:srgbClr val="F4F8FD"/>
-          </a:solidFill>
-          <a:ln w="15875">
-            <a:solidFill>
-              <a:srgbClr val="2F5597"/>
-            </a:solidFill>
-          </a:ln>
-          <a:effectLst/>
-        </p:spPr>
-        <p:style>
-          <a:lnRef idx="1">
-            <a:schemeClr val="accent1"/>
-          </a:lnRef>
-          <a:fillRef idx="3">
-            <a:schemeClr val="accent1"/>
-          </a:fillRef>
-          <a:effectRef idx="2">
-            <a:schemeClr val="accent1"/>
-          </a:effectRef>
-          <a:fontRef idx="minor">
-            <a:schemeClr val="lt1"/>
-          </a:fontRef>
-        </p:style>
-        <p:txBody>
-          <a:bodyPr rtlCol="0" anchor="ctr" wrap="square" lIns="36576" tIns="18288" rIns="36576" bIns="18288"/>
-          <a:lstStyle/>
-          <a:p>
-            <a:pPr algn="ctr"/>
-            <a:r>
-              <a:rPr sz="800" b="0" i="0">
-                <a:solidFill>
-                  <a:srgbClr val="000000"/>
-                </a:solidFill>
-                <a:latin typeface="맑은 고딕"/>
-                <a:ea typeface="맑은 고딕"/>
-              </a:rPr>
-              <a:t/>
-            </a:r>
-          </a:p>
-        </p:txBody>
-      </p:sp>
-      <p:sp>
-        <p:nvSpPr>
-          <p:cNvPr id="173" name="Rectangle 172"/>
-          <p:cNvSpPr/>
-          <p:nvPr/>
-        </p:nvSpPr>
-        <p:spPr>
-          <a:xfrm>
-            <a:off x="6629400" y="2286000"/>
-            <a:ext cx="1335024" cy="173736"/>
-          </a:xfrm>
-          <a:prstGeom prst="rect">
-            <a:avLst/>
-          </a:prstGeom>
-          <a:solidFill>
-            <a:srgbClr val="2F5597"/>
-          </a:solidFill>
-          <a:ln w="12700">
-            <a:solidFill>
-              <a:srgbClr val="2F5597"/>
-            </a:solidFill>
-          </a:ln>
-          <a:effectLst/>
-        </p:spPr>
-        <p:style>
-          <a:lnRef idx="1">
-            <a:schemeClr val="accent1"/>
-          </a:lnRef>
-          <a:fillRef idx="3">
-            <a:schemeClr val="accent1"/>
-          </a:fillRef>
-          <a:effectRef idx="2">
-            <a:schemeClr val="accent1"/>
-          </a:effectRef>
-          <a:fontRef idx="minor">
-            <a:schemeClr val="lt1"/>
-          </a:fontRef>
-        </p:style>
-        <p:txBody>
-          <a:bodyPr rtlCol="0" anchor="ctr" wrap="square" lIns="45720" tIns="0" rIns="18288" bIns="0"/>
-          <a:lstStyle/>
-          <a:p>
-            <a:pPr algn="l"/>
-            <a:r>
-              <a:rPr sz="700" b="1" i="0">
-                <a:solidFill>
-                  <a:srgbClr val="FFFFFF"/>
-                </a:solidFill>
-                <a:latin typeface="맑은 고딕"/>
-                <a:ea typeface="맑은 고딕"/>
-              </a:rPr>
-              <a:t>«node» P 노드 (Prefill)</a:t>
-            </a:r>
-          </a:p>
-        </p:txBody>
-      </p:sp>
-      <p:sp>
-        <p:nvSpPr>
-          <p:cNvPr id="174" name="Rectangle 173"/>
-          <p:cNvSpPr/>
-          <p:nvPr/>
-        </p:nvSpPr>
-        <p:spPr>
-          <a:xfrm>
-            <a:off x="6812280" y="2578608"/>
-            <a:ext cx="1417320" cy="457200"/>
-          </a:xfrm>
-          <a:prstGeom prst="rect">
-            <a:avLst/>
-          </a:prstGeom>
-          <a:solidFill>
-            <a:srgbClr val="DAE3F3"/>
-          </a:solidFill>
-          <a:ln w="12700">
-            <a:solidFill>
-              <a:srgbClr val="2F5597"/>
-            </a:solidFill>
-          </a:ln>
-          <a:effectLst/>
-        </p:spPr>
-        <p:style>
-          <a:lnRef idx="1">
-            <a:schemeClr val="accent1"/>
-          </a:lnRef>
-          <a:fillRef idx="3">
-            <a:schemeClr val="accent1"/>
-          </a:fillRef>
-          <a:effectRef idx="2">
-            <a:schemeClr val="accent1"/>
-          </a:effectRef>
-          <a:fontRef idx="minor">
-            <a:schemeClr val="lt1"/>
-          </a:fontRef>
-        </p:style>
-        <p:txBody>
-          <a:bodyPr rtlCol="0" anchor="ctr" wrap="square" lIns="64008" tIns="18288" rIns="27432" bIns="18288"/>
-          <a:lstStyle/>
-          <a:p>
-            <a:pPr algn="ctr"/>
-            <a:r>
-              <a:rPr sz="750" b="1" i="0">
-                <a:solidFill>
-                  <a:srgbClr val="000000"/>
-                </a:solidFill>
-                <a:latin typeface="맑은 고딕"/>
-                <a:ea typeface="맑은 고딕"/>
-              </a:rPr>
-              <a:t>vLLM 인스턴스</a:t>
-            </a:r>
-          </a:p>
-          <a:p>
-            <a:pPr algn="ctr"/>
-            <a:r>
-              <a:rPr sz="700" b="0" i="0">
-                <a:solidFill>
-                  <a:srgbClr val="000000"/>
-                </a:solidFill>
-                <a:latin typeface="맑은 고딕"/>
-                <a:ea typeface="맑은 고딕"/>
-              </a:rPr>
-              <a:t>DP1·DP2·DP3 노드 내 결정</a:t>
-            </a:r>
-          </a:p>
-        </p:txBody>
-      </p:sp>
-      <p:sp>
-        <p:nvSpPr>
-          <p:cNvPr id="175" name="Rectangle 174"/>
-          <p:cNvSpPr/>
-          <p:nvPr/>
-        </p:nvSpPr>
-        <p:spPr>
-          <a:xfrm>
-            <a:off x="6766560" y="2633472"/>
-            <a:ext cx="91440" cy="50292"/>
-          </a:xfrm>
-          <a:prstGeom prst="rect">
-            <a:avLst/>
-          </a:prstGeom>
-          <a:solidFill>
-            <a:srgbClr val="DAE3F3"/>
-          </a:solidFill>
-          <a:ln w="9525">
-            <a:solidFill>
-              <a:srgbClr val="2F5597"/>
-            </a:solidFill>
-          </a:ln>
-          <a:effectLst/>
-        </p:spPr>
-        <p:style>
-          <a:lnRef idx="1">
-            <a:schemeClr val="accent1"/>
-          </a:lnRef>
-          <a:fillRef idx="3">
-            <a:schemeClr val="accent1"/>
-          </a:fillRef>
-          <a:effectRef idx="2">
-            <a:schemeClr val="accent1"/>
-          </a:effectRef>
-          <a:fontRef idx="minor">
-            <a:schemeClr val="lt1"/>
-          </a:fontRef>
-        </p:style>
-        <p:txBody>
-          <a:bodyPr rtlCol="0" anchor="ctr" wrap="square" lIns="36576" tIns="18288" rIns="36576" bIns="18288"/>
-          <a:lstStyle/>
-          <a:p>
-            <a:pPr algn="ctr"/>
-            <a:r>
-              <a:rPr sz="800" b="0" i="0">
-                <a:solidFill>
-                  <a:srgbClr val="000000"/>
-                </a:solidFill>
-                <a:latin typeface="맑은 고딕"/>
-                <a:ea typeface="맑은 고딕"/>
-              </a:rPr>
-              <a:t/>
-            </a:r>
-          </a:p>
-        </p:txBody>
-      </p:sp>
-      <p:sp>
-        <p:nvSpPr>
-          <p:cNvPr id="176" name="Rectangle 175"/>
-          <p:cNvSpPr/>
-          <p:nvPr/>
-        </p:nvSpPr>
-        <p:spPr>
-          <a:xfrm>
-            <a:off x="6766560" y="2724912"/>
-            <a:ext cx="91440" cy="50292"/>
-          </a:xfrm>
-          <a:prstGeom prst="rect">
-            <a:avLst/>
-          </a:prstGeom>
-          <a:solidFill>
-            <a:srgbClr val="DAE3F3"/>
-          </a:solidFill>
-          <a:ln w="9525">
-            <a:solidFill>
-              <a:srgbClr val="2F5597"/>
-            </a:solidFill>
-          </a:ln>
-          <a:effectLst/>
-        </p:spPr>
-        <p:style>
-          <a:lnRef idx="1">
-            <a:schemeClr val="accent1"/>
-          </a:lnRef>
-          <a:fillRef idx="3">
-            <a:schemeClr val="accent1"/>
-          </a:fillRef>
-          <a:effectRef idx="2">
-            <a:schemeClr val="accent1"/>
-          </a:effectRef>
-          <a:fontRef idx="minor">
-            <a:schemeClr val="lt1"/>
-          </a:fontRef>
-        </p:style>
-        <p:txBody>
-          <a:bodyPr rtlCol="0" anchor="ctr" wrap="square" lIns="36576" tIns="18288" rIns="36576" bIns="18288"/>
-          <a:lstStyle/>
-          <a:p>
-            <a:pPr algn="ctr"/>
-            <a:r>
-              <a:rPr sz="800" b="0" i="0">
-                <a:solidFill>
-                  <a:srgbClr val="000000"/>
-                </a:solidFill>
-                <a:latin typeface="맑은 고딕"/>
-                <a:ea typeface="맑은 고딕"/>
-              </a:rPr>
-              <a:t/>
-            </a:r>
-          </a:p>
-        </p:txBody>
-      </p:sp>
-      <p:sp>
-        <p:nvSpPr>
-          <p:cNvPr id="177" name="Rectangle 176"/>
-          <p:cNvSpPr/>
-          <p:nvPr/>
-        </p:nvSpPr>
-        <p:spPr>
-          <a:xfrm>
-            <a:off x="6812280" y="3200400"/>
-            <a:ext cx="1371600" cy="457200"/>
-          </a:xfrm>
-          <a:prstGeom prst="rect">
-            <a:avLst/>
-          </a:prstGeom>
-          <a:solidFill>
-            <a:srgbClr val="F2F2F2"/>
-          </a:solidFill>
-          <a:ln w="12700">
-            <a:solidFill>
-              <a:srgbClr val="7F7F7F"/>
-            </a:solidFill>
-          </a:ln>
-          <a:effectLst/>
-        </p:spPr>
-        <p:style>
-          <a:lnRef idx="1">
-            <a:schemeClr val="accent1"/>
-          </a:lnRef>
-          <a:fillRef idx="3">
-            <a:schemeClr val="accent1"/>
-          </a:fillRef>
-          <a:effectRef idx="2">
-            <a:schemeClr val="accent1"/>
-          </a:effectRef>
-          <a:fontRef idx="minor">
-            <a:schemeClr val="lt1"/>
-          </a:fontRef>
-        </p:style>
-        <p:txBody>
-          <a:bodyPr rtlCol="0" anchor="ctr" wrap="square" lIns="36576" tIns="18288" rIns="36576" bIns="18288"/>
-          <a:lstStyle/>
-          <a:p>
-            <a:pPr algn="ctr"/>
-            <a:r>
-              <a:rPr sz="700" b="1" i="0">
-                <a:solidFill>
-                  <a:srgbClr val="000000"/>
-                </a:solidFill>
-                <a:latin typeface="맑은 고딕"/>
-                <a:ea typeface="맑은 고딕"/>
-              </a:rPr>
-              <a:t>로컬 KV 계층</a:t>
-            </a:r>
-          </a:p>
-          <a:p>
-            <a:pPr algn="ctr"/>
-            <a:r>
-              <a:rPr sz="700" b="0" i="0">
-                <a:solidFill>
-                  <a:srgbClr val="000000"/>
-                </a:solidFill>
-                <a:latin typeface="맑은 고딕"/>
-                <a:ea typeface="맑은 고딕"/>
-              </a:rPr>
-              <a:t>HBM·DRAM·CXL·SSD</a:t>
-            </a:r>
-          </a:p>
-        </p:txBody>
-      </p:sp>
-      <p:sp>
-        <p:nvSpPr>
-          <p:cNvPr id="178" name="Rectangle 177"/>
-          <p:cNvSpPr/>
-          <p:nvPr/>
-        </p:nvSpPr>
-        <p:spPr>
-          <a:xfrm>
-            <a:off x="10104120" y="2286000"/>
-            <a:ext cx="1737360" cy="1691640"/>
-          </a:xfrm>
-          <a:prstGeom prst="rect">
-            <a:avLst/>
-          </a:prstGeom>
-          <a:solidFill>
-            <a:srgbClr val="F4F8FD"/>
-          </a:solidFill>
-          <a:ln w="15875">
-            <a:solidFill>
-              <a:srgbClr val="2F5597"/>
-            </a:solidFill>
-          </a:ln>
-          <a:effectLst/>
-        </p:spPr>
-        <p:style>
-          <a:lnRef idx="1">
-            <a:schemeClr val="accent1"/>
-          </a:lnRef>
-          <a:fillRef idx="3">
-            <a:schemeClr val="accent1"/>
-          </a:fillRef>
-          <a:effectRef idx="2">
-            <a:schemeClr val="accent1"/>
-          </a:effectRef>
-          <a:fontRef idx="minor">
-            <a:schemeClr val="lt1"/>
-          </a:fontRef>
-        </p:style>
-        <p:txBody>
-          <a:bodyPr rtlCol="0" anchor="ctr" wrap="square" lIns="36576" tIns="18288" rIns="36576" bIns="18288"/>
-          <a:lstStyle/>
-          <a:p>
-            <a:pPr algn="ctr"/>
-            <a:r>
-              <a:rPr sz="800" b="0" i="0">
-                <a:solidFill>
-                  <a:srgbClr val="000000"/>
-                </a:solidFill>
-                <a:latin typeface="맑은 고딕"/>
-                <a:ea typeface="맑은 고딕"/>
-              </a:rPr>
-              <a:t/>
-            </a:r>
-          </a:p>
-        </p:txBody>
-      </p:sp>
-      <p:sp>
-        <p:nvSpPr>
-          <p:cNvPr id="179" name="Rectangle 178"/>
-          <p:cNvSpPr/>
-          <p:nvPr/>
-        </p:nvSpPr>
-        <p:spPr>
-          <a:xfrm>
-            <a:off x="10104120" y="2286000"/>
-            <a:ext cx="1283817" cy="173736"/>
-          </a:xfrm>
-          <a:prstGeom prst="rect">
-            <a:avLst/>
-          </a:prstGeom>
-          <a:solidFill>
-            <a:srgbClr val="2F5597"/>
-          </a:solidFill>
-          <a:ln w="12700">
-            <a:solidFill>
-              <a:srgbClr val="2F5597"/>
-            </a:solidFill>
-          </a:ln>
-          <a:effectLst/>
-        </p:spPr>
-        <p:style>
-          <a:lnRef idx="1">
-            <a:schemeClr val="accent1"/>
-          </a:lnRef>
-          <a:fillRef idx="3">
-            <a:schemeClr val="accent1"/>
-          </a:fillRef>
-          <a:effectRef idx="2">
-            <a:schemeClr val="accent1"/>
-          </a:effectRef>
-          <a:fontRef idx="minor">
-            <a:schemeClr val="lt1"/>
-          </a:fontRef>
-        </p:style>
-        <p:txBody>
-          <a:bodyPr rtlCol="0" anchor="ctr" wrap="square" lIns="45720" tIns="0" rIns="18288" bIns="0"/>
-          <a:lstStyle/>
-          <a:p>
-            <a:pPr algn="l"/>
-            <a:r>
-              <a:rPr sz="700" b="1" i="0">
-                <a:solidFill>
-                  <a:srgbClr val="FFFFFF"/>
-                </a:solidFill>
-                <a:latin typeface="맑은 고딕"/>
-                <a:ea typeface="맑은 고딕"/>
-              </a:rPr>
-              <a:t>«node» D 노드 (Decode)</a:t>
-            </a:r>
-          </a:p>
-        </p:txBody>
-      </p:sp>
-      <p:sp>
-        <p:nvSpPr>
-          <p:cNvPr id="180" name="Rectangle 179"/>
-          <p:cNvSpPr/>
-          <p:nvPr/>
-        </p:nvSpPr>
-        <p:spPr>
-          <a:xfrm>
-            <a:off x="10287000" y="2578608"/>
-            <a:ext cx="1417320" cy="457200"/>
-          </a:xfrm>
-          <a:prstGeom prst="rect">
-            <a:avLst/>
-          </a:prstGeom>
-          <a:solidFill>
-            <a:srgbClr val="DAE3F3"/>
-          </a:solidFill>
-          <a:ln w="12700">
-            <a:solidFill>
-              <a:srgbClr val="2F5597"/>
-            </a:solidFill>
-          </a:ln>
-          <a:effectLst/>
-        </p:spPr>
-        <p:style>
-          <a:lnRef idx="1">
-            <a:schemeClr val="accent1"/>
-          </a:lnRef>
-          <a:fillRef idx="3">
-            <a:schemeClr val="accent1"/>
-          </a:fillRef>
-          <a:effectRef idx="2">
-            <a:schemeClr val="accent1"/>
-          </a:effectRef>
-          <a:fontRef idx="minor">
-            <a:schemeClr val="lt1"/>
-          </a:fontRef>
-        </p:style>
-        <p:txBody>
-          <a:bodyPr rtlCol="0" anchor="ctr" wrap="square" lIns="64008" tIns="18288" rIns="27432" bIns="18288"/>
-          <a:lstStyle/>
-          <a:p>
-            <a:pPr algn="ctr"/>
-            <a:r>
-              <a:rPr sz="750" b="1" i="0">
-                <a:solidFill>
-                  <a:srgbClr val="000000"/>
-                </a:solidFill>
-                <a:latin typeface="맑은 고딕"/>
-                <a:ea typeface="맑은 고딕"/>
-              </a:rPr>
-              <a:t>vLLM 인스턴스</a:t>
-            </a:r>
-          </a:p>
-          <a:p>
-            <a:pPr algn="ctr"/>
-            <a:r>
-              <a:rPr sz="700" b="0" i="0">
-                <a:solidFill>
-                  <a:srgbClr val="000000"/>
-                </a:solidFill>
-                <a:latin typeface="맑은 고딕"/>
-                <a:ea typeface="맑은 고딕"/>
-              </a:rPr>
-              <a:t>DP1·DP2·DP3 노드 내 결정</a:t>
-            </a:r>
-          </a:p>
-        </p:txBody>
-      </p:sp>
-      <p:sp>
-        <p:nvSpPr>
-          <p:cNvPr id="181" name="Rectangle 180"/>
-          <p:cNvSpPr/>
-          <p:nvPr/>
-        </p:nvSpPr>
-        <p:spPr>
-          <a:xfrm>
-            <a:off x="10241280" y="2633472"/>
-            <a:ext cx="91440" cy="50292"/>
-          </a:xfrm>
-          <a:prstGeom prst="rect">
-            <a:avLst/>
-          </a:prstGeom>
-          <a:solidFill>
-            <a:srgbClr val="DAE3F3"/>
-          </a:solidFill>
-          <a:ln w="9525">
-            <a:solidFill>
-              <a:srgbClr val="2F5597"/>
-            </a:solidFill>
-          </a:ln>
-          <a:effectLst/>
-        </p:spPr>
-        <p:style>
-          <a:lnRef idx="1">
-            <a:schemeClr val="accent1"/>
-          </a:lnRef>
-          <a:fillRef idx="3">
-            <a:schemeClr val="accent1"/>
-          </a:fillRef>
-          <a:effectRef idx="2">
-            <a:schemeClr val="accent1"/>
-          </a:effectRef>
-          <a:fontRef idx="minor">
-            <a:schemeClr val="lt1"/>
-          </a:fontRef>
-        </p:style>
-        <p:txBody>
-          <a:bodyPr rtlCol="0" anchor="ctr" wrap="square" lIns="36576" tIns="18288" rIns="36576" bIns="18288"/>
-          <a:lstStyle/>
-          <a:p>
-            <a:pPr algn="ctr"/>
-            <a:r>
-              <a:rPr sz="800" b="0" i="0">
-                <a:solidFill>
-                  <a:srgbClr val="000000"/>
-                </a:solidFill>
-                <a:latin typeface="맑은 고딕"/>
-                <a:ea typeface="맑은 고딕"/>
-              </a:rPr>
-              <a:t/>
-            </a:r>
-          </a:p>
-        </p:txBody>
-      </p:sp>
-      <p:sp>
-        <p:nvSpPr>
-          <p:cNvPr id="182" name="Rectangle 181"/>
-          <p:cNvSpPr/>
-          <p:nvPr/>
-        </p:nvSpPr>
-        <p:spPr>
-          <a:xfrm>
-            <a:off x="10241280" y="2724912"/>
-            <a:ext cx="91440" cy="50292"/>
-          </a:xfrm>
-          <a:prstGeom prst="rect">
-            <a:avLst/>
-          </a:prstGeom>
-          <a:solidFill>
-            <a:srgbClr val="DAE3F3"/>
-          </a:solidFill>
-          <a:ln w="9525">
-            <a:solidFill>
-              <a:srgbClr val="2F5597"/>
-            </a:solidFill>
-          </a:ln>
-          <a:effectLst/>
-        </p:spPr>
-        <p:style>
-          <a:lnRef idx="1">
-            <a:schemeClr val="accent1"/>
-          </a:lnRef>
-          <a:fillRef idx="3">
-            <a:schemeClr val="accent1"/>
-          </a:fillRef>
-          <a:effectRef idx="2">
-            <a:schemeClr val="accent1"/>
-          </a:effectRef>
-          <a:fontRef idx="minor">
-            <a:schemeClr val="lt1"/>
-          </a:fontRef>
-        </p:style>
-        <p:txBody>
-          <a:bodyPr rtlCol="0" anchor="ctr" wrap="square" lIns="36576" tIns="18288" rIns="36576" bIns="18288"/>
-          <a:lstStyle/>
-          <a:p>
-            <a:pPr algn="ctr"/>
-            <a:r>
-              <a:rPr sz="800" b="0" i="0">
-                <a:solidFill>
-                  <a:srgbClr val="000000"/>
-                </a:solidFill>
-                <a:latin typeface="맑은 고딕"/>
-                <a:ea typeface="맑은 고딕"/>
-              </a:rPr>
-              <a:t/>
-            </a:r>
-          </a:p>
-        </p:txBody>
-      </p:sp>
-      <p:sp>
-        <p:nvSpPr>
-          <p:cNvPr id="183" name="Rectangle 182"/>
-          <p:cNvSpPr/>
-          <p:nvPr/>
-        </p:nvSpPr>
-        <p:spPr>
-          <a:xfrm>
-            <a:off x="10287000" y="3200400"/>
-            <a:ext cx="1371600" cy="457200"/>
-          </a:xfrm>
-          <a:prstGeom prst="rect">
-            <a:avLst/>
-          </a:prstGeom>
-          <a:solidFill>
-            <a:srgbClr val="F2F2F2"/>
-          </a:solidFill>
-          <a:ln w="12700">
-            <a:solidFill>
-              <a:srgbClr val="7F7F7F"/>
-            </a:solidFill>
-          </a:ln>
-          <a:effectLst/>
-        </p:spPr>
-        <p:style>
-          <a:lnRef idx="1">
-            <a:schemeClr val="accent1"/>
-          </a:lnRef>
-          <a:fillRef idx="3">
-            <a:schemeClr val="accent1"/>
-          </a:fillRef>
-          <a:effectRef idx="2">
-            <a:schemeClr val="accent1"/>
-          </a:effectRef>
-          <a:fontRef idx="minor">
-            <a:schemeClr val="lt1"/>
-          </a:fontRef>
-        </p:style>
-        <p:txBody>
-          <a:bodyPr rtlCol="0" anchor="ctr" wrap="square" lIns="36576" tIns="18288" rIns="36576" bIns="18288"/>
-          <a:lstStyle/>
-          <a:p>
-            <a:pPr algn="ctr"/>
-            <a:r>
-              <a:rPr sz="700" b="1" i="0">
-                <a:solidFill>
-                  <a:srgbClr val="000000"/>
-                </a:solidFill>
-                <a:latin typeface="맑은 고딕"/>
-                <a:ea typeface="맑은 고딕"/>
-              </a:rPr>
-              <a:t>로컬 KV 계층</a:t>
-            </a:r>
-          </a:p>
-          <a:p>
-            <a:pPr algn="ctr"/>
-            <a:r>
-              <a:rPr sz="700" b="0" i="0">
-                <a:solidFill>
-                  <a:srgbClr val="000000"/>
-                </a:solidFill>
-                <a:latin typeface="맑은 고딕"/>
-                <a:ea typeface="맑은 고딕"/>
-              </a:rPr>
-              <a:t>HBM·DRAM·CXL·SSD</a:t>
-            </a:r>
-          </a:p>
-        </p:txBody>
-      </p:sp>
-      <p:sp>
-        <p:nvSpPr>
-          <p:cNvPr id="184" name="Rectangle 183"/>
-          <p:cNvSpPr/>
-          <p:nvPr/>
-        </p:nvSpPr>
-        <p:spPr>
-          <a:xfrm>
-            <a:off x="8686800" y="2286000"/>
-            <a:ext cx="1097280" cy="1691640"/>
-          </a:xfrm>
-          <a:prstGeom prst="rect">
-            <a:avLst/>
-          </a:prstGeom>
-          <a:solidFill>
-            <a:srgbClr val="FFF8F3"/>
-          </a:solidFill>
-          <a:ln w="15875">
-            <a:solidFill>
-              <a:srgbClr val="C55A11"/>
-            </a:solidFill>
-          </a:ln>
-          <a:effectLst/>
-        </p:spPr>
-        <p:style>
-          <a:lnRef idx="1">
-            <a:schemeClr val="accent1"/>
-          </a:lnRef>
-          <a:fillRef idx="3">
-            <a:schemeClr val="accent1"/>
-          </a:fillRef>
-          <a:effectRef idx="2">
-            <a:schemeClr val="accent1"/>
-          </a:effectRef>
-          <a:fontRef idx="minor">
-            <a:schemeClr val="lt1"/>
-          </a:fontRef>
-        </p:style>
-        <p:txBody>
-          <a:bodyPr rtlCol="0" anchor="ctr" wrap="square" lIns="36576" tIns="18288" rIns="36576" bIns="18288"/>
-          <a:lstStyle/>
-          <a:p>
-            <a:pPr algn="ctr"/>
-            <a:r>
-              <a:rPr sz="800" b="0" i="0">
-                <a:solidFill>
-                  <a:srgbClr val="000000"/>
-                </a:solidFill>
-                <a:latin typeface="맑은 고딕"/>
-                <a:ea typeface="맑은 고딕"/>
-              </a:rPr>
-              <a:t/>
-            </a:r>
-          </a:p>
-        </p:txBody>
-      </p:sp>
-      <p:sp>
-        <p:nvSpPr>
-          <p:cNvPr id="185" name="Rectangle 184"/>
-          <p:cNvSpPr/>
-          <p:nvPr/>
-        </p:nvSpPr>
-        <p:spPr>
-          <a:xfrm>
-            <a:off x="8686800" y="2286000"/>
-            <a:ext cx="841248" cy="173736"/>
-          </a:xfrm>
-          <a:prstGeom prst="rect">
-            <a:avLst/>
-          </a:prstGeom>
-          <a:solidFill>
-            <a:srgbClr val="C55A11"/>
-          </a:solidFill>
-          <a:ln w="12700">
-            <a:solidFill>
-              <a:srgbClr val="C55A11"/>
-            </a:solidFill>
-          </a:ln>
-          <a:effectLst/>
-        </p:spPr>
-        <p:style>
-          <a:lnRef idx="1">
-            <a:schemeClr val="accent1"/>
-          </a:lnRef>
-          <a:fillRef idx="3">
-            <a:schemeClr val="accent1"/>
-          </a:fillRef>
-          <a:effectRef idx="2">
-            <a:schemeClr val="accent1"/>
-          </a:effectRef>
-          <a:fontRef idx="minor">
-            <a:schemeClr val="lt1"/>
-          </a:fontRef>
-        </p:style>
-        <p:txBody>
-          <a:bodyPr rtlCol="0" anchor="ctr" wrap="square" lIns="45720" tIns="0" rIns="18288" bIns="0"/>
-          <a:lstStyle/>
-          <a:p>
-            <a:pPr algn="l"/>
-            <a:r>
-              <a:rPr sz="700" b="1" i="0">
-                <a:solidFill>
-                  <a:srgbClr val="FFFFFF"/>
-                </a:solidFill>
-                <a:latin typeface="맑은 고딕"/>
-                <a:ea typeface="맑은 고딕"/>
-              </a:rPr>
-              <a:t>«store» KV 풀</a:t>
-            </a:r>
-          </a:p>
-        </p:txBody>
-      </p:sp>
-      <p:sp>
-        <p:nvSpPr>
-          <p:cNvPr id="186" name="Rectangle 185"/>
-          <p:cNvSpPr/>
-          <p:nvPr/>
-        </p:nvSpPr>
-        <p:spPr>
-          <a:xfrm>
-            <a:off x="8759952" y="2542032"/>
-            <a:ext cx="950976" cy="457200"/>
-          </a:xfrm>
-          <a:prstGeom prst="rect">
-            <a:avLst/>
-          </a:prstGeom>
-          <a:solidFill>
-            <a:srgbClr val="FBE5D6"/>
-          </a:solidFill>
-          <a:ln w="12700">
-            <a:solidFill>
-              <a:srgbClr val="C55A11"/>
-            </a:solidFill>
-          </a:ln>
-          <a:effectLst/>
-        </p:spPr>
-        <p:style>
-          <a:lnRef idx="1">
-            <a:schemeClr val="accent1"/>
-          </a:lnRef>
-          <a:fillRef idx="3">
-            <a:schemeClr val="accent1"/>
-          </a:fillRef>
-          <a:effectRef idx="2">
-            <a:schemeClr val="accent1"/>
-          </a:effectRef>
-          <a:fontRef idx="minor">
-            <a:schemeClr val="lt1"/>
-          </a:fontRef>
-        </p:style>
-        <p:txBody>
-          <a:bodyPr rtlCol="0" anchor="ctr" wrap="square" lIns="36576" tIns="18288" rIns="36576" bIns="18288"/>
-          <a:lstStyle/>
-          <a:p>
-            <a:pPr algn="ctr"/>
-            <a:r>
-              <a:rPr sz="700" b="1" i="0">
-                <a:solidFill>
-                  <a:srgbClr val="000000"/>
-                </a:solidFill>
-                <a:latin typeface="맑은 고딕"/>
-                <a:ea typeface="맑은 고딕"/>
-              </a:rPr>
-              <a:t>풀 메타데이터</a:t>
-            </a:r>
-          </a:p>
-          <a:p>
-            <a:pPr algn="ctr"/>
-            <a:r>
-              <a:rPr sz="700" b="0" i="0">
-                <a:solidFill>
-                  <a:srgbClr val="000000"/>
-                </a:solidFill>
-                <a:latin typeface="맑은 고딕"/>
-                <a:ea typeface="맑은 고딕"/>
-              </a:rPr>
-              <a:t>(위치·상태)</a:t>
-            </a:r>
-          </a:p>
-        </p:txBody>
-      </p:sp>
-      <p:sp>
-        <p:nvSpPr>
-          <p:cNvPr id="187" name="Rectangle 186"/>
-          <p:cNvSpPr/>
-          <p:nvPr/>
-        </p:nvSpPr>
-        <p:spPr>
-          <a:xfrm>
-            <a:off x="8759952" y="3108960"/>
-            <a:ext cx="950976" cy="256032"/>
-          </a:xfrm>
-          <a:prstGeom prst="rect">
-            <a:avLst/>
-          </a:prstGeom>
-          <a:solidFill>
-            <a:srgbClr val="FBE5D6"/>
-          </a:solidFill>
-          <a:ln w="12700">
-            <a:solidFill>
-              <a:srgbClr val="C55A11"/>
-            </a:solidFill>
-          </a:ln>
-          <a:effectLst/>
-        </p:spPr>
-        <p:style>
-          <a:lnRef idx="1">
-            <a:schemeClr val="accent1"/>
-          </a:lnRef>
-          <a:fillRef idx="3">
-            <a:schemeClr val="accent1"/>
-          </a:fillRef>
-          <a:effectRef idx="2">
-            <a:schemeClr val="accent1"/>
-          </a:effectRef>
-          <a:fontRef idx="minor">
-            <a:schemeClr val="lt1"/>
-          </a:fontRef>
-        </p:style>
-        <p:txBody>
-          <a:bodyPr rtlCol="0" anchor="ctr" wrap="square" lIns="36576" tIns="18288" rIns="36576" bIns="18288"/>
-          <a:lstStyle/>
-          <a:p>
-            <a:pPr algn="ctr"/>
-            <a:r>
-              <a:rPr sz="700" b="0" i="0">
-                <a:solidFill>
-                  <a:srgbClr val="000000"/>
-                </a:solidFill>
-                <a:latin typeface="맑은 고딕"/>
-                <a:ea typeface="맑은 고딕"/>
-              </a:rPr>
-              <a:t>KV 블록 (공유)</a:t>
-            </a:r>
-          </a:p>
-        </p:txBody>
-      </p:sp>
-      <p:sp>
-        <p:nvSpPr>
-          <p:cNvPr id="188" name="Rectangle 187"/>
-          <p:cNvSpPr/>
-          <p:nvPr/>
-        </p:nvSpPr>
-        <p:spPr>
-          <a:xfrm>
-            <a:off x="8759952" y="3401568"/>
-            <a:ext cx="950976" cy="256032"/>
-          </a:xfrm>
-          <a:prstGeom prst="rect">
-            <a:avLst/>
-          </a:prstGeom>
-          <a:solidFill>
-            <a:srgbClr val="FBE5D6"/>
-          </a:solidFill>
-          <a:ln w="12700">
-            <a:solidFill>
-              <a:srgbClr val="C55A11"/>
-            </a:solidFill>
-          </a:ln>
-          <a:effectLst/>
-        </p:spPr>
-        <p:style>
-          <a:lnRef idx="1">
-            <a:schemeClr val="accent1"/>
-          </a:lnRef>
-          <a:fillRef idx="3">
-            <a:schemeClr val="accent1"/>
-          </a:fillRef>
-          <a:effectRef idx="2">
-            <a:schemeClr val="accent1"/>
-          </a:effectRef>
-          <a:fontRef idx="minor">
-            <a:schemeClr val="lt1"/>
-          </a:fontRef>
-        </p:style>
-        <p:txBody>
-          <a:bodyPr rtlCol="0" anchor="ctr" wrap="square" lIns="36576" tIns="18288" rIns="36576" bIns="18288"/>
-          <a:lstStyle/>
-          <a:p>
-            <a:pPr algn="ctr"/>
-            <a:r>
-              <a:rPr sz="700" b="0" i="0">
-                <a:solidFill>
-                  <a:srgbClr val="000000"/>
-                </a:solidFill>
-                <a:latin typeface="맑은 고딕"/>
-                <a:ea typeface="맑은 고딕"/>
-              </a:rPr>
-              <a:t>Comp.KV (공유)</a:t>
-            </a:r>
-          </a:p>
-        </p:txBody>
-      </p:sp>
-      <p:sp>
-        <p:nvSpPr>
-          <p:cNvPr id="189" name="TextBox 188"/>
-          <p:cNvSpPr txBox="1"/>
-          <p:nvPr/>
-        </p:nvSpPr>
-        <p:spPr>
-          <a:xfrm>
-            <a:off x="8714232" y="3703320"/>
-            <a:ext cx="1042415" cy="256032"/>
-          </a:xfrm>
-          <a:prstGeom prst="rect">
-            <a:avLst/>
-          </a:prstGeom>
-          <a:noFill/>
-        </p:spPr>
-        <p:txBody>
-          <a:bodyPr wrap="square" lIns="0" tIns="0" rIns="0" bIns="0" anchor="t">
-            <a:spAutoFit/>
-          </a:bodyPr>
-          <a:lstStyle/>
-          <a:p>
-            <a:pPr algn="ctr"/>
-            <a:r>
-              <a:rPr sz="600" b="0" i="0">
-                <a:solidFill>
-                  <a:srgbClr val="C55A11"/>
-                </a:solidFill>
-                <a:latin typeface="맑은 고딕"/>
-                <a:ea typeface="맑은 고딕"/>
-              </a:rPr>
-              <a:t>DRAM·SSD (CXL 교체 가능)</a:t>
-            </a:r>
-          </a:p>
-        </p:txBody>
-      </p:sp>
-      <p:cxnSp>
-        <p:nvCxnSpPr>
-          <p:cNvPr id="190" name="Connector 189"/>
-          <p:cNvCxnSpPr/>
-          <p:nvPr/>
-        </p:nvCxnSpPr>
-        <p:spPr>
-          <a:xfrm>
-            <a:off x="9235440" y="2130552"/>
-            <a:ext cx="0" cy="155448"/>
-          </a:xfrm>
-          <a:prstGeom prst="line">
-            <a:avLst/>
-          </a:prstGeom>
-          <a:ln w="15875">
-            <a:solidFill>
-              <a:srgbClr val="404040"/>
-            </a:solidFill>
-            <a:tailEnd type="triangle"/>
-          </a:ln>
-        </p:spPr>
-        <p:style>
-          <a:lnRef idx="2">
-            <a:schemeClr val="accent1"/>
-          </a:lnRef>
-          <a:fillRef idx="0">
-            <a:schemeClr val="accent1"/>
-          </a:fillRef>
-          <a:effectRef idx="1">
-            <a:schemeClr val="accent1"/>
-          </a:effectRef>
-          <a:fontRef idx="minor">
-            <a:schemeClr val="tx1"/>
-          </a:fontRef>
-        </p:style>
-      </p:cxnSp>
-      <p:sp>
-        <p:nvSpPr>
-          <p:cNvPr id="191" name="Oval 190"/>
-          <p:cNvSpPr/>
-          <p:nvPr/>
-        </p:nvSpPr>
-        <p:spPr>
-          <a:xfrm>
-            <a:off x="9157715" y="2130552"/>
-            <a:ext cx="155448" cy="155448"/>
-          </a:xfrm>
-          <a:prstGeom prst="ellipse">
-            <a:avLst/>
-          </a:prstGeom>
-          <a:solidFill>
-            <a:srgbClr val="404040"/>
-          </a:solidFill>
-          <a:ln w="9525">
-            <a:solidFill>
-              <a:srgbClr val="FFFFFF"/>
-            </a:solidFill>
-          </a:ln>
-          <a:effectLst/>
-        </p:spPr>
-        <p:style>
-          <a:lnRef idx="1">
-            <a:schemeClr val="accent1"/>
-          </a:lnRef>
-          <a:fillRef idx="3">
-            <a:schemeClr val="accent1"/>
-          </a:fillRef>
-          <a:effectRef idx="2">
-            <a:schemeClr val="accent1"/>
-          </a:effectRef>
-          <a:fontRef idx="minor">
-            <a:schemeClr val="lt1"/>
-          </a:fontRef>
-        </p:style>
-        <p:txBody>
-          <a:bodyPr rtlCol="0" anchor="ctr" wrap="square" lIns="0" tIns="0" rIns="0" bIns="0"/>
-          <a:lstStyle/>
-          <a:p>
-            <a:pPr algn="ctr"/>
-            <a:r>
-              <a:rPr sz="650" b="1" i="0">
-                <a:solidFill>
-                  <a:srgbClr val="FFFFFF"/>
-                </a:solidFill>
-                <a:latin typeface="맑은 고딕"/>
-                <a:ea typeface="맑은 고딕"/>
-              </a:rPr>
-              <a:t>4</a:t>
-            </a:r>
-          </a:p>
-        </p:txBody>
-      </p:sp>
-      <p:cxnSp>
-        <p:nvCxnSpPr>
-          <p:cNvPr id="192" name="Connector 191"/>
-          <p:cNvCxnSpPr/>
-          <p:nvPr/>
-        </p:nvCxnSpPr>
-        <p:spPr>
-          <a:xfrm>
-            <a:off x="8366760" y="3246120"/>
-            <a:ext cx="320040" cy="0"/>
-          </a:xfrm>
-          <a:prstGeom prst="line">
-            <a:avLst/>
-          </a:prstGeom>
-          <a:ln w="15875">
-            <a:solidFill>
-              <a:srgbClr val="2F5597"/>
-            </a:solidFill>
-            <a:tailEnd type="triangle"/>
-          </a:ln>
-        </p:spPr>
-        <p:style>
-          <a:lnRef idx="2">
-            <a:schemeClr val="accent1"/>
-          </a:lnRef>
-          <a:fillRef idx="0">
-            <a:schemeClr val="accent1"/>
-          </a:fillRef>
-          <a:effectRef idx="1">
-            <a:schemeClr val="accent1"/>
-          </a:effectRef>
-          <a:fontRef idx="minor">
-            <a:schemeClr val="tx1"/>
-          </a:fontRef>
-        </p:style>
-      </p:cxnSp>
-      <p:sp>
-        <p:nvSpPr>
-          <p:cNvPr id="193" name="Oval 192"/>
-          <p:cNvSpPr/>
-          <p:nvPr/>
-        </p:nvSpPr>
-        <p:spPr>
-          <a:xfrm>
-            <a:off x="8449055" y="3168396"/>
-            <a:ext cx="155448" cy="155448"/>
-          </a:xfrm>
-          <a:prstGeom prst="ellipse">
-            <a:avLst/>
-          </a:prstGeom>
-          <a:solidFill>
-            <a:srgbClr val="2F5597"/>
-          </a:solidFill>
-          <a:ln w="9525">
-            <a:solidFill>
-              <a:srgbClr val="FFFFFF"/>
-            </a:solidFill>
-          </a:ln>
-          <a:effectLst/>
-        </p:spPr>
-        <p:style>
-          <a:lnRef idx="1">
-            <a:schemeClr val="accent1"/>
-          </a:lnRef>
-          <a:fillRef idx="3">
-            <a:schemeClr val="accent1"/>
-          </a:fillRef>
-          <a:effectRef idx="2">
-            <a:schemeClr val="accent1"/>
-          </a:effectRef>
-          <a:fontRef idx="minor">
-            <a:schemeClr val="lt1"/>
-          </a:fontRef>
-        </p:style>
-        <p:txBody>
-          <a:bodyPr rtlCol="0" anchor="ctr" wrap="square" lIns="0" tIns="0" rIns="0" bIns="0"/>
-          <a:lstStyle/>
-          <a:p>
-            <a:pPr algn="ctr"/>
-            <a:r>
-              <a:rPr sz="650" b="1" i="0">
-                <a:solidFill>
-                  <a:srgbClr val="FFFFFF"/>
-                </a:solidFill>
-                <a:latin typeface="맑은 고딕"/>
-                <a:ea typeface="맑은 고딕"/>
-              </a:rPr>
-              <a:t>1</a:t>
-            </a:r>
-          </a:p>
-        </p:txBody>
-      </p:sp>
-      <p:cxnSp>
-        <p:nvCxnSpPr>
-          <p:cNvPr id="194" name="Connector 193"/>
-          <p:cNvCxnSpPr/>
-          <p:nvPr/>
-        </p:nvCxnSpPr>
-        <p:spPr>
-          <a:xfrm>
-            <a:off x="9784080" y="3246120"/>
-            <a:ext cx="320040" cy="0"/>
-          </a:xfrm>
-          <a:prstGeom prst="line">
-            <a:avLst/>
-          </a:prstGeom>
-          <a:ln w="15875">
-            <a:solidFill>
-              <a:srgbClr val="2F5597"/>
-            </a:solidFill>
-            <a:tailEnd type="triangle"/>
-          </a:ln>
-        </p:spPr>
-        <p:style>
-          <a:lnRef idx="2">
-            <a:schemeClr val="accent1"/>
-          </a:lnRef>
-          <a:fillRef idx="0">
-            <a:schemeClr val="accent1"/>
-          </a:fillRef>
-          <a:effectRef idx="1">
-            <a:schemeClr val="accent1"/>
-          </a:effectRef>
-          <a:fontRef idx="minor">
-            <a:schemeClr val="tx1"/>
-          </a:fontRef>
-        </p:style>
-      </p:cxnSp>
-      <p:sp>
-        <p:nvSpPr>
-          <p:cNvPr id="195" name="Oval 194"/>
-          <p:cNvSpPr/>
-          <p:nvPr/>
-        </p:nvSpPr>
-        <p:spPr>
-          <a:xfrm>
-            <a:off x="9866376" y="3168396"/>
-            <a:ext cx="155448" cy="155448"/>
-          </a:xfrm>
-          <a:prstGeom prst="ellipse">
-            <a:avLst/>
-          </a:prstGeom>
-          <a:solidFill>
-            <a:srgbClr val="2F5597"/>
-          </a:solidFill>
-          <a:ln w="9525">
-            <a:solidFill>
-              <a:srgbClr val="FFFFFF"/>
-            </a:solidFill>
-          </a:ln>
-          <a:effectLst/>
-        </p:spPr>
-        <p:style>
-          <a:lnRef idx="1">
-            <a:schemeClr val="accent1"/>
-          </a:lnRef>
-          <a:fillRef idx="3">
-            <a:schemeClr val="accent1"/>
-          </a:fillRef>
-          <a:effectRef idx="2">
-            <a:schemeClr val="accent1"/>
-          </a:effectRef>
-          <a:fontRef idx="minor">
-            <a:schemeClr val="lt1"/>
-          </a:fontRef>
-        </p:style>
-        <p:txBody>
-          <a:bodyPr rtlCol="0" anchor="ctr" wrap="square" lIns="0" tIns="0" rIns="0" bIns="0"/>
-          <a:lstStyle/>
-          <a:p>
-            <a:pPr algn="ctr"/>
-            <a:r>
-              <a:rPr sz="650" b="1" i="0">
-                <a:solidFill>
-                  <a:srgbClr val="FFFFFF"/>
-                </a:solidFill>
-                <a:latin typeface="맑은 고딕"/>
-                <a:ea typeface="맑은 고딕"/>
-              </a:rPr>
-              <a:t>2</a:t>
-            </a:r>
-          </a:p>
-        </p:txBody>
-      </p:sp>
-      <p:cxnSp>
-        <p:nvCxnSpPr>
-          <p:cNvPr id="196" name="Connector 195"/>
-          <p:cNvCxnSpPr/>
-          <p:nvPr/>
-        </p:nvCxnSpPr>
-        <p:spPr>
-          <a:xfrm flipH="1">
-            <a:off x="8366760" y="3566160"/>
-            <a:ext cx="320040" cy="0"/>
-          </a:xfrm>
-          <a:prstGeom prst="line">
-            <a:avLst/>
-          </a:prstGeom>
-          <a:ln w="15875">
-            <a:solidFill>
-              <a:srgbClr val="2F5597"/>
-            </a:solidFill>
-            <a:tailEnd type="triangle"/>
-          </a:ln>
-        </p:spPr>
-        <p:style>
-          <a:lnRef idx="2">
-            <a:schemeClr val="accent1"/>
-          </a:lnRef>
-          <a:fillRef idx="0">
-            <a:schemeClr val="accent1"/>
-          </a:fillRef>
-          <a:effectRef idx="1">
-            <a:schemeClr val="accent1"/>
-          </a:effectRef>
-          <a:fontRef idx="minor">
-            <a:schemeClr val="tx1"/>
-          </a:fontRef>
-        </p:style>
-      </p:cxnSp>
-      <p:sp>
-        <p:nvSpPr>
-          <p:cNvPr id="197" name="Oval 196"/>
-          <p:cNvSpPr/>
-          <p:nvPr/>
-        </p:nvSpPr>
-        <p:spPr>
-          <a:xfrm>
-            <a:off x="8449055" y="3488436"/>
-            <a:ext cx="155448" cy="155448"/>
-          </a:xfrm>
-          <a:prstGeom prst="ellipse">
-            <a:avLst/>
-          </a:prstGeom>
-          <a:solidFill>
-            <a:srgbClr val="2F5597"/>
-          </a:solidFill>
-          <a:ln w="9525">
-            <a:solidFill>
-              <a:srgbClr val="FFFFFF"/>
-            </a:solidFill>
-          </a:ln>
-          <a:effectLst/>
-        </p:spPr>
-        <p:style>
-          <a:lnRef idx="1">
-            <a:schemeClr val="accent1"/>
-          </a:lnRef>
-          <a:fillRef idx="3">
-            <a:schemeClr val="accent1"/>
-          </a:fillRef>
-          <a:effectRef idx="2">
-            <a:schemeClr val="accent1"/>
-          </a:effectRef>
-          <a:fontRef idx="minor">
-            <a:schemeClr val="lt1"/>
-          </a:fontRef>
-        </p:style>
-        <p:txBody>
-          <a:bodyPr rtlCol="0" anchor="ctr" wrap="square" lIns="0" tIns="0" rIns="0" bIns="0"/>
-          <a:lstStyle/>
-          <a:p>
-            <a:pPr algn="ctr"/>
-            <a:r>
-              <a:rPr sz="650" b="1" i="0">
-                <a:solidFill>
-                  <a:srgbClr val="FFFFFF"/>
-                </a:solidFill>
-                <a:latin typeface="맑은 고딕"/>
-                <a:ea typeface="맑은 고딕"/>
-              </a:rPr>
-              <a:t>3</a:t>
-            </a:r>
-          </a:p>
-        </p:txBody>
-      </p:sp>
-      <p:sp>
-        <p:nvSpPr>
-          <p:cNvPr id="198" name="Rounded Rectangle 197"/>
-          <p:cNvSpPr/>
-          <p:nvPr/>
-        </p:nvSpPr>
-        <p:spPr>
-          <a:xfrm>
-            <a:off x="6656832" y="4087368"/>
-            <a:ext cx="329184" cy="155448"/>
-          </a:xfrm>
-          <a:prstGeom prst="roundRect">
-            <a:avLst/>
-          </a:prstGeom>
-          <a:solidFill>
-            <a:srgbClr val="404040"/>
-          </a:solidFill>
-          <a:ln w="12700">
-            <a:solidFill>
-              <a:srgbClr val="404040"/>
-            </a:solidFill>
-          </a:ln>
-          <a:effectLst/>
-        </p:spPr>
-        <p:style>
-          <a:lnRef idx="1">
-            <a:schemeClr val="accent1"/>
-          </a:lnRef>
-          <a:fillRef idx="3">
-            <a:schemeClr val="accent1"/>
-          </a:fillRef>
-          <a:effectRef idx="2">
-            <a:schemeClr val="accent1"/>
-          </a:effectRef>
-          <a:fontRef idx="minor">
-            <a:schemeClr val="lt1"/>
-          </a:fontRef>
-        </p:style>
-        <p:txBody>
-          <a:bodyPr rtlCol="0" anchor="ctr" wrap="square" lIns="0" tIns="0" rIns="0" bIns="0"/>
-          <a:lstStyle/>
-          <a:p>
-            <a:pPr algn="ctr"/>
-            <a:r>
-              <a:rPr sz="650" b="1" i="0">
-                <a:solidFill>
-                  <a:srgbClr val="FFFFFF"/>
-                </a:solidFill>
-                <a:latin typeface="맑은 고딕"/>
-                <a:ea typeface="맑은 고딕"/>
-              </a:rPr>
-              <a:t>DP1</a:t>
-            </a:r>
-          </a:p>
-        </p:txBody>
-      </p:sp>
-      <p:sp>
-        <p:nvSpPr>
-          <p:cNvPr id="199" name="TextBox 198"/>
-          <p:cNvSpPr txBox="1"/>
-          <p:nvPr/>
-        </p:nvSpPr>
-        <p:spPr>
-          <a:xfrm>
-            <a:off x="7040880" y="4069080"/>
-            <a:ext cx="4754880" cy="182880"/>
-          </a:xfrm>
-          <a:prstGeom prst="rect">
-            <a:avLst/>
-          </a:prstGeom>
-          <a:noFill/>
-        </p:spPr>
-        <p:txBody>
-          <a:bodyPr wrap="square" lIns="0" tIns="0" rIns="0" bIns="0" anchor="t">
-            <a:spAutoFit/>
-          </a:bodyPr>
-          <a:lstStyle/>
-          <a:p>
-            <a:pPr algn="l"/>
-            <a:r>
-              <a:rPr sz="700" b="0" i="0">
-                <a:solidFill>
-                  <a:srgbClr val="404040"/>
-                </a:solidFill>
-                <a:latin typeface="맑은 고딕"/>
-                <a:ea typeface="맑은 고딕"/>
-              </a:rPr>
-              <a:t>노드 내 tier 배치(공유·전송 대상 KV 포함)는 DP1이 결정</a:t>
-            </a:r>
-          </a:p>
-        </p:txBody>
-      </p:sp>
-      <p:sp>
-        <p:nvSpPr>
-          <p:cNvPr id="200" name="Rounded Rectangle 199"/>
-          <p:cNvSpPr/>
-          <p:nvPr/>
-        </p:nvSpPr>
-        <p:spPr>
-          <a:xfrm>
-            <a:off x="6656832" y="4325112"/>
-            <a:ext cx="329184" cy="155448"/>
-          </a:xfrm>
-          <a:prstGeom prst="roundRect">
-            <a:avLst/>
-          </a:prstGeom>
-          <a:solidFill>
-            <a:srgbClr val="404040"/>
-          </a:solidFill>
-          <a:ln w="12700">
-            <a:solidFill>
-              <a:srgbClr val="404040"/>
-            </a:solidFill>
-          </a:ln>
-          <a:effectLst/>
-        </p:spPr>
-        <p:style>
-          <a:lnRef idx="1">
-            <a:schemeClr val="accent1"/>
-          </a:lnRef>
-          <a:fillRef idx="3">
-            <a:schemeClr val="accent1"/>
-          </a:fillRef>
-          <a:effectRef idx="2">
-            <a:schemeClr val="accent1"/>
-          </a:effectRef>
-          <a:fontRef idx="minor">
-            <a:schemeClr val="lt1"/>
-          </a:fontRef>
-        </p:style>
-        <p:txBody>
-          <a:bodyPr rtlCol="0" anchor="ctr" wrap="square" lIns="0" tIns="0" rIns="0" bIns="0"/>
-          <a:lstStyle/>
-          <a:p>
-            <a:pPr algn="ctr"/>
-            <a:r>
-              <a:rPr sz="650" b="1" i="0">
-                <a:solidFill>
-                  <a:srgbClr val="FFFFFF"/>
-                </a:solidFill>
-                <a:latin typeface="맑은 고딕"/>
-                <a:ea typeface="맑은 고딕"/>
-              </a:rPr>
-              <a:t>DP2</a:t>
-            </a:r>
-          </a:p>
-        </p:txBody>
-      </p:sp>
-      <p:sp>
-        <p:nvSpPr>
-          <p:cNvPr id="201" name="TextBox 200"/>
-          <p:cNvSpPr txBox="1"/>
-          <p:nvPr/>
-        </p:nvSpPr>
-        <p:spPr>
-          <a:xfrm>
-            <a:off x="7040880" y="4306824"/>
-            <a:ext cx="4754880" cy="182880"/>
-          </a:xfrm>
-          <a:prstGeom prst="rect">
-            <a:avLst/>
-          </a:prstGeom>
-          <a:noFill/>
-        </p:spPr>
-        <p:txBody>
-          <a:bodyPr wrap="square" lIns="0" tIns="0" rIns="0" bIns="0" anchor="t">
-            <a:spAutoFit/>
-          </a:bodyPr>
-          <a:lstStyle/>
-          <a:p>
-            <a:pPr algn="l"/>
-            <a:r>
-              <a:rPr sz="700" b="0" i="0">
-                <a:solidFill>
-                  <a:srgbClr val="404040"/>
-                </a:solidFill>
-                <a:latin typeface="맑은 고딕"/>
-                <a:ea typeface="맑은 고딕"/>
-              </a:rPr>
-              <a:t>Planner가 Tmove를 풀 메타데이터·접근 비용에서 조회</a:t>
-            </a:r>
-          </a:p>
-        </p:txBody>
-      </p:sp>
-      <p:sp>
-        <p:nvSpPr>
-          <p:cNvPr id="202" name="Rounded Rectangle 201"/>
-          <p:cNvSpPr/>
-          <p:nvPr/>
-        </p:nvSpPr>
-        <p:spPr>
-          <a:xfrm>
-            <a:off x="6656832" y="4562856"/>
-            <a:ext cx="329184" cy="155448"/>
-          </a:xfrm>
-          <a:prstGeom prst="roundRect">
-            <a:avLst/>
-          </a:prstGeom>
-          <a:solidFill>
-            <a:srgbClr val="404040"/>
-          </a:solidFill>
-          <a:ln w="12700">
-            <a:solidFill>
-              <a:srgbClr val="404040"/>
-            </a:solidFill>
-          </a:ln>
-          <a:effectLst/>
-        </p:spPr>
-        <p:style>
-          <a:lnRef idx="1">
-            <a:schemeClr val="accent1"/>
-          </a:lnRef>
-          <a:fillRef idx="3">
-            <a:schemeClr val="accent1"/>
-          </a:fillRef>
-          <a:effectRef idx="2">
-            <a:schemeClr val="accent1"/>
-          </a:effectRef>
-          <a:fontRef idx="minor">
-            <a:schemeClr val="lt1"/>
-          </a:fontRef>
-        </p:style>
-        <p:txBody>
-          <a:bodyPr rtlCol="0" anchor="ctr" wrap="square" lIns="0" tIns="0" rIns="0" bIns="0"/>
-          <a:lstStyle/>
-          <a:p>
-            <a:pPr algn="ctr"/>
-            <a:r>
-              <a:rPr sz="650" b="1" i="0">
-                <a:solidFill>
-                  <a:srgbClr val="FFFFFF"/>
-                </a:solidFill>
-                <a:latin typeface="맑은 고딕"/>
-                <a:ea typeface="맑은 고딕"/>
-              </a:rPr>
-              <a:t>DP3</a:t>
-            </a:r>
-          </a:p>
-        </p:txBody>
-      </p:sp>
-      <p:sp>
-        <p:nvSpPr>
-          <p:cNvPr id="203" name="TextBox 202"/>
-          <p:cNvSpPr txBox="1"/>
-          <p:nvPr/>
-        </p:nvSpPr>
-        <p:spPr>
-          <a:xfrm>
-            <a:off x="7040880" y="4544568"/>
-            <a:ext cx="4754880" cy="182880"/>
-          </a:xfrm>
-          <a:prstGeom prst="rect">
-            <a:avLst/>
-          </a:prstGeom>
-          <a:noFill/>
-        </p:spPr>
-        <p:txBody>
-          <a:bodyPr wrap="square" lIns="0" tIns="0" rIns="0" bIns="0" anchor="t">
-            <a:spAutoFit/>
-          </a:bodyPr>
-          <a:lstStyle/>
-          <a:p>
-            <a:pPr algn="l"/>
-            <a:r>
-              <a:rPr sz="700" b="0" i="0">
-                <a:solidFill>
-                  <a:srgbClr val="404040"/>
-                </a:solidFill>
-                <a:latin typeface="맑은 고딕"/>
-                <a:ea typeface="맑은 고딕"/>
-              </a:rPr>
-              <a:t>압축된 Comp.KV를 풀에 공유 (요청 간 재사용)</a:t>
+              <a:t>풀 tier는 DP1 백엔드 인터페이스의 한 backend로 접근</a:t>
             </a:r>
           </a:p>
         </p:txBody>
